--- a/marketing/regions/sverdlovsk/sitall-gov-deck-sverdlovsk.pptx
+++ b/marketing/regions/sverdlovsk/sitall-gov-deck-sverdlovsk.pptx
@@ -4,6 +4,9 @@
   <p:sldMasterIdLst>
     <p:sldMasterId id="2147483648" r:id="rId1"/>
   </p:sldMasterIdLst>
+  <p:notesMasterIdLst>
+    <p:notesMasterId r:id="rId13"/>
+  </p:notesMasterIdLst>
   <p:sldIdLst>
     <p:sldId id="256" r:id="rId2"/>
     <p:sldId id="257" r:id="rId3"/>
@@ -133,6 +136,440 @@
 </p:presentation>
 </file>
 
+<file path=ppt/notesMasters/notesMaster1.xml><?xml version="1.0" encoding="utf-8"?>
+<p:notesMaster xmlns:a="http://schemas.openxmlformats.org/drawingml/2006/main" xmlns:r="http://schemas.openxmlformats.org/officeDocument/2006/relationships" xmlns:p="http://schemas.openxmlformats.org/presentationml/2006/main">
+  <p:cSld>
+    <p:bg>
+      <p:bgRef idx="1001">
+        <a:schemeClr val="bg1"/>
+      </p:bgRef>
+    </p:bg>
+    <p:spTree>
+      <p:nvGrpSpPr>
+        <p:cNvPr id="1" name=""/>
+        <p:cNvGrpSpPr/>
+        <p:nvPr/>
+      </p:nvGrpSpPr>
+      <p:grpSpPr>
+        <a:xfrm>
+          <a:off x="0" y="0"/>
+          <a:ext cx="0" cy="0"/>
+          <a:chOff x="0" y="0"/>
+          <a:chExt cx="0" cy="0"/>
+        </a:xfrm>
+      </p:grpSpPr>
+      <p:sp>
+        <p:nvSpPr>
+          <p:cNvPr id="2" name="Верхний колонтитул 1"/>
+          <p:cNvSpPr>
+            <a:spLocks noGrp="1"/>
+          </p:cNvSpPr>
+          <p:nvPr>
+            <p:ph type="hdr" sz="quarter"/>
+          </p:nvPr>
+        </p:nvSpPr>
+        <p:spPr>
+          <a:xfrm>
+            <a:off x="0" y="0"/>
+            <a:ext cx="2971800" cy="458788"/>
+          </a:xfrm>
+          <a:prstGeom prst="rect">
+            <a:avLst/>
+          </a:prstGeom>
+        </p:spPr>
+        <p:txBody>
+          <a:bodyPr vert="horz" lIns="91440" tIns="45720" rIns="91440" bIns="45720" rtlCol="0"/>
+          <a:lstStyle>
+            <a:lvl1pPr algn="l">
+              <a:defRPr sz="1200"/>
+            </a:lvl1pPr>
+          </a:lstStyle>
+          <a:p>
+            <a:endParaRPr lang="ru-KZ"/>
+          </a:p>
+        </p:txBody>
+      </p:sp>
+      <p:sp>
+        <p:nvSpPr>
+          <p:cNvPr id="3" name="Дата 2"/>
+          <p:cNvSpPr>
+            <a:spLocks noGrp="1"/>
+          </p:cNvSpPr>
+          <p:nvPr>
+            <p:ph type="dt" idx="1"/>
+          </p:nvPr>
+        </p:nvSpPr>
+        <p:spPr>
+          <a:xfrm>
+            <a:off x="3884613" y="0"/>
+            <a:ext cx="2971800" cy="458788"/>
+          </a:xfrm>
+          <a:prstGeom prst="rect">
+            <a:avLst/>
+          </a:prstGeom>
+        </p:spPr>
+        <p:txBody>
+          <a:bodyPr vert="horz" lIns="91440" tIns="45720" rIns="91440" bIns="45720" rtlCol="0"/>
+          <a:lstStyle>
+            <a:lvl1pPr algn="r">
+              <a:defRPr sz="1200"/>
+            </a:lvl1pPr>
+          </a:lstStyle>
+          <a:p>
+            <a:fld id="{925DC83B-54F1-FF42-8EBF-1B493607C836}" type="datetimeFigureOut">
+              <a:rPr lang="ru-KZ" smtClean="0"/>
+              <a:t>23.08.2026</a:t>
+            </a:fld>
+            <a:endParaRPr lang="ru-KZ"/>
+          </a:p>
+        </p:txBody>
+      </p:sp>
+      <p:sp>
+        <p:nvSpPr>
+          <p:cNvPr id="4" name="Образ слайда 3"/>
+          <p:cNvSpPr>
+            <a:spLocks noGrp="1" noRot="1" noChangeAspect="1"/>
+          </p:cNvSpPr>
+          <p:nvPr>
+            <p:ph type="sldImg" idx="2"/>
+          </p:nvPr>
+        </p:nvSpPr>
+        <p:spPr>
+          <a:xfrm>
+            <a:off x="685800" y="1143000"/>
+            <a:ext cx="5486400" cy="3086100"/>
+          </a:xfrm>
+          <a:prstGeom prst="rect">
+            <a:avLst/>
+          </a:prstGeom>
+          <a:noFill/>
+          <a:ln w="12700">
+            <a:solidFill>
+              <a:prstClr val="black"/>
+            </a:solidFill>
+          </a:ln>
+        </p:spPr>
+        <p:txBody>
+          <a:bodyPr vert="horz" lIns="91440" tIns="45720" rIns="91440" bIns="45720" rtlCol="0" anchor="ctr"/>
+          <a:lstStyle/>
+          <a:p>
+            <a:endParaRPr lang="ru-KZ"/>
+          </a:p>
+        </p:txBody>
+      </p:sp>
+      <p:sp>
+        <p:nvSpPr>
+          <p:cNvPr id="5" name="Заметки 4"/>
+          <p:cNvSpPr>
+            <a:spLocks noGrp="1"/>
+          </p:cNvSpPr>
+          <p:nvPr>
+            <p:ph type="body" sz="quarter" idx="3"/>
+          </p:nvPr>
+        </p:nvSpPr>
+        <p:spPr>
+          <a:xfrm>
+            <a:off x="685800" y="4400550"/>
+            <a:ext cx="5486400" cy="3600450"/>
+          </a:xfrm>
+          <a:prstGeom prst="rect">
+            <a:avLst/>
+          </a:prstGeom>
+        </p:spPr>
+        <p:txBody>
+          <a:bodyPr vert="horz" lIns="91440" tIns="45720" rIns="91440" bIns="45720" rtlCol="0"/>
+          <a:lstStyle/>
+          <a:p>
+            <a:pPr lvl="0"/>
+            <a:r>
+              <a:rPr lang="ru-RU"/>
+              <a:t>Образец текста</a:t>
+            </a:r>
+          </a:p>
+          <a:p>
+            <a:pPr lvl="1"/>
+            <a:r>
+              <a:rPr lang="ru-RU"/>
+              <a:t>Второй уровень</a:t>
+            </a:r>
+          </a:p>
+          <a:p>
+            <a:pPr lvl="2"/>
+            <a:r>
+              <a:rPr lang="ru-RU"/>
+              <a:t>Третий уровень</a:t>
+            </a:r>
+          </a:p>
+          <a:p>
+            <a:pPr lvl="3"/>
+            <a:r>
+              <a:rPr lang="ru-RU"/>
+              <a:t>Четвертый уровень</a:t>
+            </a:r>
+          </a:p>
+          <a:p>
+            <a:pPr lvl="4"/>
+            <a:r>
+              <a:rPr lang="ru-RU"/>
+              <a:t>Пятый уровень</a:t>
+            </a:r>
+            <a:endParaRPr lang="ru-KZ"/>
+          </a:p>
+        </p:txBody>
+      </p:sp>
+      <p:sp>
+        <p:nvSpPr>
+          <p:cNvPr id="6" name="Нижний колонтитул 5"/>
+          <p:cNvSpPr>
+            <a:spLocks noGrp="1"/>
+          </p:cNvSpPr>
+          <p:nvPr>
+            <p:ph type="ftr" sz="quarter" idx="4"/>
+          </p:nvPr>
+        </p:nvSpPr>
+        <p:spPr>
+          <a:xfrm>
+            <a:off x="0" y="8685213"/>
+            <a:ext cx="2971800" cy="458787"/>
+          </a:xfrm>
+          <a:prstGeom prst="rect">
+            <a:avLst/>
+          </a:prstGeom>
+        </p:spPr>
+        <p:txBody>
+          <a:bodyPr vert="horz" lIns="91440" tIns="45720" rIns="91440" bIns="45720" rtlCol="0" anchor="b"/>
+          <a:lstStyle>
+            <a:lvl1pPr algn="l">
+              <a:defRPr sz="1200"/>
+            </a:lvl1pPr>
+          </a:lstStyle>
+          <a:p>
+            <a:endParaRPr lang="ru-KZ"/>
+          </a:p>
+        </p:txBody>
+      </p:sp>
+      <p:sp>
+        <p:nvSpPr>
+          <p:cNvPr id="7" name="Номер слайда 6"/>
+          <p:cNvSpPr>
+            <a:spLocks noGrp="1"/>
+          </p:cNvSpPr>
+          <p:nvPr>
+            <p:ph type="sldNum" sz="quarter" idx="5"/>
+          </p:nvPr>
+        </p:nvSpPr>
+        <p:spPr>
+          <a:xfrm>
+            <a:off x="3884613" y="8685213"/>
+            <a:ext cx="2971800" cy="458787"/>
+          </a:xfrm>
+          <a:prstGeom prst="rect">
+            <a:avLst/>
+          </a:prstGeom>
+        </p:spPr>
+        <p:txBody>
+          <a:bodyPr vert="horz" lIns="91440" tIns="45720" rIns="91440" bIns="45720" rtlCol="0" anchor="b"/>
+          <a:lstStyle>
+            <a:lvl1pPr algn="r">
+              <a:defRPr sz="1200"/>
+            </a:lvl1pPr>
+          </a:lstStyle>
+          <a:p>
+            <a:fld id="{CB2A7D08-BC0B-F048-8ECE-02478965929E}" type="slidenum">
+              <a:rPr lang="ru-KZ" smtClean="0"/>
+              <a:t>‹#›</a:t>
+            </a:fld>
+            <a:endParaRPr lang="ru-KZ"/>
+          </a:p>
+        </p:txBody>
+      </p:sp>
+    </p:spTree>
+    <p:extLst>
+      <p:ext uri="{BB962C8B-B14F-4D97-AF65-F5344CB8AC3E}">
+        <p14:creationId xmlns:p14="http://schemas.microsoft.com/office/powerpoint/2010/main" val="141448599"/>
+      </p:ext>
+    </p:extLst>
+  </p:cSld>
+  <p:clrMap bg1="lt1" tx1="dk1" bg2="lt2" tx2="dk2" accent1="accent1" accent2="accent2" accent3="accent3" accent4="accent4" accent5="accent5" accent6="accent6" hlink="hlink" folHlink="folHlink"/>
+  <p:notesStyle>
+    <a:lvl1pPr marL="0" algn="l" defTabSz="914400" rtl="0" eaLnBrk="1" latinLnBrk="0" hangingPunct="1">
+      <a:defRPr sz="1200" kern="1200">
+        <a:solidFill>
+          <a:schemeClr val="tx1"/>
+        </a:solidFill>
+        <a:latin typeface="+mn-lt"/>
+        <a:ea typeface="+mn-ea"/>
+        <a:cs typeface="+mn-cs"/>
+      </a:defRPr>
+    </a:lvl1pPr>
+    <a:lvl2pPr marL="457200" algn="l" defTabSz="914400" rtl="0" eaLnBrk="1" latinLnBrk="0" hangingPunct="1">
+      <a:defRPr sz="1200" kern="1200">
+        <a:solidFill>
+          <a:schemeClr val="tx1"/>
+        </a:solidFill>
+        <a:latin typeface="+mn-lt"/>
+        <a:ea typeface="+mn-ea"/>
+        <a:cs typeface="+mn-cs"/>
+      </a:defRPr>
+    </a:lvl2pPr>
+    <a:lvl3pPr marL="914400" algn="l" defTabSz="914400" rtl="0" eaLnBrk="1" latinLnBrk="0" hangingPunct="1">
+      <a:defRPr sz="1200" kern="1200">
+        <a:solidFill>
+          <a:schemeClr val="tx1"/>
+        </a:solidFill>
+        <a:latin typeface="+mn-lt"/>
+        <a:ea typeface="+mn-ea"/>
+        <a:cs typeface="+mn-cs"/>
+      </a:defRPr>
+    </a:lvl3pPr>
+    <a:lvl4pPr marL="1371600" algn="l" defTabSz="914400" rtl="0" eaLnBrk="1" latinLnBrk="0" hangingPunct="1">
+      <a:defRPr sz="1200" kern="1200">
+        <a:solidFill>
+          <a:schemeClr val="tx1"/>
+        </a:solidFill>
+        <a:latin typeface="+mn-lt"/>
+        <a:ea typeface="+mn-ea"/>
+        <a:cs typeface="+mn-cs"/>
+      </a:defRPr>
+    </a:lvl4pPr>
+    <a:lvl5pPr marL="1828800" algn="l" defTabSz="914400" rtl="0" eaLnBrk="1" latinLnBrk="0" hangingPunct="1">
+      <a:defRPr sz="1200" kern="1200">
+        <a:solidFill>
+          <a:schemeClr val="tx1"/>
+        </a:solidFill>
+        <a:latin typeface="+mn-lt"/>
+        <a:ea typeface="+mn-ea"/>
+        <a:cs typeface="+mn-cs"/>
+      </a:defRPr>
+    </a:lvl5pPr>
+    <a:lvl6pPr marL="2286000" algn="l" defTabSz="914400" rtl="0" eaLnBrk="1" latinLnBrk="0" hangingPunct="1">
+      <a:defRPr sz="1200" kern="1200">
+        <a:solidFill>
+          <a:schemeClr val="tx1"/>
+        </a:solidFill>
+        <a:latin typeface="+mn-lt"/>
+        <a:ea typeface="+mn-ea"/>
+        <a:cs typeface="+mn-cs"/>
+      </a:defRPr>
+    </a:lvl6pPr>
+    <a:lvl7pPr marL="2743200" algn="l" defTabSz="914400" rtl="0" eaLnBrk="1" latinLnBrk="0" hangingPunct="1">
+      <a:defRPr sz="1200" kern="1200">
+        <a:solidFill>
+          <a:schemeClr val="tx1"/>
+        </a:solidFill>
+        <a:latin typeface="+mn-lt"/>
+        <a:ea typeface="+mn-ea"/>
+        <a:cs typeface="+mn-cs"/>
+      </a:defRPr>
+    </a:lvl7pPr>
+    <a:lvl8pPr marL="3200400" algn="l" defTabSz="914400" rtl="0" eaLnBrk="1" latinLnBrk="0" hangingPunct="1">
+      <a:defRPr sz="1200" kern="1200">
+        <a:solidFill>
+          <a:schemeClr val="tx1"/>
+        </a:solidFill>
+        <a:latin typeface="+mn-lt"/>
+        <a:ea typeface="+mn-ea"/>
+        <a:cs typeface="+mn-cs"/>
+      </a:defRPr>
+    </a:lvl8pPr>
+    <a:lvl9pPr marL="3657600" algn="l" defTabSz="914400" rtl="0" eaLnBrk="1" latinLnBrk="0" hangingPunct="1">
+      <a:defRPr sz="1200" kern="1200">
+        <a:solidFill>
+          <a:schemeClr val="tx1"/>
+        </a:solidFill>
+        <a:latin typeface="+mn-lt"/>
+        <a:ea typeface="+mn-ea"/>
+        <a:cs typeface="+mn-cs"/>
+      </a:defRPr>
+    </a:lvl9pPr>
+  </p:notesStyle>
+</p:notesMaster>
+</file>
+
+<file path=ppt/notesSlides/notesSlide1.xml><?xml version="1.0" encoding="utf-8"?>
+<p:notes xmlns:a="http://schemas.openxmlformats.org/drawingml/2006/main" xmlns:r="http://schemas.openxmlformats.org/officeDocument/2006/relationships" xmlns:p="http://schemas.openxmlformats.org/presentationml/2006/main">
+  <p:cSld>
+    <p:spTree>
+      <p:nvGrpSpPr>
+        <p:cNvPr id="1" name=""/>
+        <p:cNvGrpSpPr/>
+        <p:nvPr/>
+      </p:nvGrpSpPr>
+      <p:grpSpPr>
+        <a:xfrm>
+          <a:off x="0" y="0"/>
+          <a:ext cx="0" cy="0"/>
+          <a:chOff x="0" y="0"/>
+          <a:chExt cx="0" cy="0"/>
+        </a:xfrm>
+      </p:grpSpPr>
+      <p:sp>
+        <p:nvSpPr>
+          <p:cNvPr id="2" name="Образ слайда 1"/>
+          <p:cNvSpPr>
+            <a:spLocks noGrp="1" noRot="1" noChangeAspect="1"/>
+          </p:cNvSpPr>
+          <p:nvPr>
+            <p:ph type="sldImg"/>
+          </p:nvPr>
+        </p:nvSpPr>
+        <p:spPr/>
+      </p:sp>
+      <p:sp>
+        <p:nvSpPr>
+          <p:cNvPr id="3" name="Заметки 2"/>
+          <p:cNvSpPr>
+            <a:spLocks noGrp="1"/>
+          </p:cNvSpPr>
+          <p:nvPr>
+            <p:ph type="body" idx="1"/>
+          </p:nvPr>
+        </p:nvSpPr>
+        <p:spPr/>
+        <p:txBody>
+          <a:bodyPr/>
+          <a:lstStyle/>
+          <a:p>
+            <a:endParaRPr lang="ru-KZ" dirty="0"/>
+          </a:p>
+        </p:txBody>
+      </p:sp>
+      <p:sp>
+        <p:nvSpPr>
+          <p:cNvPr id="4" name="Номер слайда 3"/>
+          <p:cNvSpPr>
+            <a:spLocks noGrp="1"/>
+          </p:cNvSpPr>
+          <p:nvPr>
+            <p:ph type="sldNum" sz="quarter" idx="5"/>
+          </p:nvPr>
+        </p:nvSpPr>
+        <p:spPr/>
+        <p:txBody>
+          <a:bodyPr/>
+          <a:lstStyle/>
+          <a:p>
+            <a:fld id="{CB2A7D08-BC0B-F048-8ECE-02478965929E}" type="slidenum">
+              <a:rPr lang="ru-KZ" smtClean="0"/>
+              <a:t>8</a:t>
+            </a:fld>
+            <a:endParaRPr lang="ru-KZ"/>
+          </a:p>
+        </p:txBody>
+      </p:sp>
+    </p:spTree>
+    <p:extLst>
+      <p:ext uri="{BB962C8B-B14F-4D97-AF65-F5344CB8AC3E}">
+        <p14:creationId xmlns:p14="http://schemas.microsoft.com/office/powerpoint/2010/main" val="616059199"/>
+      </p:ext>
+    </p:extLst>
+  </p:cSld>
+  <p:clrMapOvr>
+    <a:masterClrMapping/>
+  </p:clrMapOvr>
+</p:notes>
+</file>
+
 <file path=ppt/slideLayouts/slideLayout1.xml><?xml version="1.0" encoding="utf-8"?>
 <p:sldLayout xmlns:a="http://schemas.openxmlformats.org/drawingml/2006/main" xmlns:r="http://schemas.openxmlformats.org/officeDocument/2006/relationships" xmlns:p="http://schemas.openxmlformats.org/presentationml/2006/main" type="title" preserve="1">
   <p:cSld name="Title Slide">
@@ -312,7 +749,7 @@
           <a:p>
             <a:fld id="{5BCAD085-E8A6-8845-BD4E-CB4CCA059FC4}" type="datetimeFigureOut">
               <a:rPr lang="en-US" smtClean="0"/>
-              <a:t>8/22/2026</a:t>
+              <a:t>8/23/26</a:t>
             </a:fld>
             <a:endParaRPr lang="en-US"/>
           </a:p>
@@ -480,7 +917,7 @@
           <a:p>
             <a:fld id="{5BCAD085-E8A6-8845-BD4E-CB4CCA059FC4}" type="datetimeFigureOut">
               <a:rPr lang="en-US" smtClean="0"/>
-              <a:t>8/22/2026</a:t>
+              <a:t>8/23/26</a:t>
             </a:fld>
             <a:endParaRPr lang="en-US"/>
           </a:p>
@@ -658,7 +1095,7 @@
           <a:p>
             <a:fld id="{5BCAD085-E8A6-8845-BD4E-CB4CCA059FC4}" type="datetimeFigureOut">
               <a:rPr lang="en-US" smtClean="0"/>
-              <a:t>8/22/2026</a:t>
+              <a:t>8/23/26</a:t>
             </a:fld>
             <a:endParaRPr lang="en-US"/>
           </a:p>
@@ -826,7 +1263,7 @@
           <a:p>
             <a:fld id="{5BCAD085-E8A6-8845-BD4E-CB4CCA059FC4}" type="datetimeFigureOut">
               <a:rPr lang="en-US" smtClean="0"/>
-              <a:t>8/22/2026</a:t>
+              <a:t>8/23/26</a:t>
             </a:fld>
             <a:endParaRPr lang="en-US"/>
           </a:p>
@@ -1071,7 +1508,7 @@
           <a:p>
             <a:fld id="{5BCAD085-E8A6-8845-BD4E-CB4CCA059FC4}" type="datetimeFigureOut">
               <a:rPr lang="en-US" smtClean="0"/>
-              <a:t>8/22/2026</a:t>
+              <a:t>8/23/26</a:t>
             </a:fld>
             <a:endParaRPr lang="en-US"/>
           </a:p>
@@ -1356,7 +1793,7 @@
           <a:p>
             <a:fld id="{5BCAD085-E8A6-8845-BD4E-CB4CCA059FC4}" type="datetimeFigureOut">
               <a:rPr lang="en-US" smtClean="0"/>
-              <a:t>8/22/2026</a:t>
+              <a:t>8/23/26</a:t>
             </a:fld>
             <a:endParaRPr lang="en-US"/>
           </a:p>
@@ -1775,7 +2212,7 @@
           <a:p>
             <a:fld id="{5BCAD085-E8A6-8845-BD4E-CB4CCA059FC4}" type="datetimeFigureOut">
               <a:rPr lang="en-US" smtClean="0"/>
-              <a:t>8/22/2026</a:t>
+              <a:t>8/23/26</a:t>
             </a:fld>
             <a:endParaRPr lang="en-US"/>
           </a:p>
@@ -1892,7 +2329,7 @@
           <a:p>
             <a:fld id="{5BCAD085-E8A6-8845-BD4E-CB4CCA059FC4}" type="datetimeFigureOut">
               <a:rPr lang="en-US" smtClean="0"/>
-              <a:t>8/22/2026</a:t>
+              <a:t>8/23/26</a:t>
             </a:fld>
             <a:endParaRPr lang="en-US"/>
           </a:p>
@@ -1987,7 +2424,7 @@
           <a:p>
             <a:fld id="{5BCAD085-E8A6-8845-BD4E-CB4CCA059FC4}" type="datetimeFigureOut">
               <a:rPr lang="en-US" smtClean="0"/>
-              <a:t>8/22/2026</a:t>
+              <a:t>8/23/26</a:t>
             </a:fld>
             <a:endParaRPr lang="en-US"/>
           </a:p>
@@ -2262,7 +2699,7 @@
           <a:p>
             <a:fld id="{5BCAD085-E8A6-8845-BD4E-CB4CCA059FC4}" type="datetimeFigureOut">
               <a:rPr lang="en-US" smtClean="0"/>
-              <a:t>8/22/2026</a:t>
+              <a:t>8/23/26</a:t>
             </a:fld>
             <a:endParaRPr lang="en-US"/>
           </a:p>
@@ -2514,7 +2951,7 @@
           <a:p>
             <a:fld id="{5BCAD085-E8A6-8845-BD4E-CB4CCA059FC4}" type="datetimeFigureOut">
               <a:rPr lang="en-US" smtClean="0"/>
-              <a:t>8/22/2026</a:t>
+              <a:t>8/23/26</a:t>
             </a:fld>
             <a:endParaRPr lang="en-US"/>
           </a:p>
@@ -2725,7 +3162,7 @@
           <a:p>
             <a:fld id="{5BCAD085-E8A6-8845-BD4E-CB4CCA059FC4}" type="datetimeFigureOut">
               <a:rPr lang="en-US" smtClean="0"/>
-              <a:t>8/22/2026</a:t>
+              <a:t>8/23/26</a:t>
             </a:fld>
             <a:endParaRPr lang="en-US"/>
           </a:p>
@@ -4400,7 +4837,7 @@
               </a:spcAft>
             </a:pPr>
             <a:r>
-              <a:rPr sz="2300" b="0" i="0">
+              <a:rPr sz="2300" b="0" i="0" dirty="0">
                 <a:solidFill>
                   <a:srgbClr val="1E2761"/>
                 </a:solidFill>
@@ -4513,7 +4950,7 @@
         <p:spPr>
           <a:xfrm>
             <a:off x="5007864" y="3255264"/>
-            <a:ext cx="2429255" cy="603504"/>
+            <a:ext cx="2429255" cy="739818"/>
           </a:xfrm>
           <a:prstGeom prst="rect">
             <a:avLst/>
@@ -4535,14 +4972,47 @@
               </a:spcAft>
             </a:pPr>
             <a:r>
-              <a:rPr sz="1400" b="0" i="0">
-                <a:solidFill>
-                  <a:srgbClr val="1B2140"/>
-                </a:solidFill>
-                <a:latin typeface="Segoe UI"/>
-              </a:rPr>
-              <a:t>ФГУП «ЗащитаИнфоТранс»: импортозамещение, реестр ПО</a:t>
-            </a:r>
+              <a:rPr lang="en-US" sz="1400" dirty="0">
+                <a:solidFill>
+                  <a:srgbClr val="1B2140"/>
+                </a:solidFill>
+                <a:latin typeface="Segoe UI"/>
+              </a:rPr>
+              <a:t>X5</a:t>
+            </a:r>
+            <a:r>
+              <a:rPr lang="ru-RU" sz="1400" dirty="0">
+                <a:solidFill>
+                  <a:srgbClr val="1B2140"/>
+                </a:solidFill>
+                <a:latin typeface="Segoe UI"/>
+              </a:rPr>
+              <a:t> </a:t>
+            </a:r>
+            <a:r>
+              <a:rPr lang="en-US" sz="1400" dirty="0">
+                <a:solidFill>
+                  <a:srgbClr val="1B2140"/>
+                </a:solidFill>
+                <a:latin typeface="Segoe UI"/>
+              </a:rPr>
+              <a:t>RETAIL – </a:t>
+            </a:r>
+            <a:r>
+              <a:rPr lang="ru-RU" sz="1400" dirty="0">
+                <a:solidFill>
+                  <a:srgbClr val="1B2140"/>
+                </a:solidFill>
+                <a:latin typeface="Segoe UI"/>
+              </a:rPr>
+              <a:t>команда внедрения новых технологий в розничную сеть </a:t>
+            </a:r>
+            <a:endParaRPr sz="1400" b="0" i="0" dirty="0">
+              <a:solidFill>
+                <a:srgbClr val="1B2140"/>
+              </a:solidFill>
+              <a:latin typeface="Segoe UI"/>
+            </a:endParaRPr>
           </a:p>
         </p:txBody>
       </p:sp>
@@ -4600,7 +5070,7 @@
         <p:spPr>
           <a:xfrm>
             <a:off x="5007864" y="4059936"/>
-            <a:ext cx="2429255" cy="603504"/>
+            <a:ext cx="2429255" cy="739818"/>
           </a:xfrm>
           <a:prstGeom prst="rect">
             <a:avLst/>
@@ -4613,22 +5083,37 @@
           </a:bodyPr>
           <a:lstStyle/>
           <a:p>
-            <a:pPr algn="l">
+            <a:pPr>
               <a:lnSpc>
                 <a:spcPct val="118000"/>
               </a:lnSpc>
-              <a:spcAft>
-                <a:spcPts val="0"/>
-              </a:spcAft>
             </a:pPr>
             <a:r>
-              <a:rPr sz="1400" b="0" i="0">
-                <a:solidFill>
-                  <a:srgbClr val="1B2140"/>
-                </a:solidFill>
-                <a:latin typeface="Segoe UI"/>
-              </a:rPr>
-              <a:t>Студия разработки: команда 4 → 15 человек, 50 проектов</a:t>
+              <a:rPr lang="ru-RU" sz="1400" dirty="0">
+                <a:solidFill>
+                  <a:srgbClr val="1B2140"/>
+                </a:solidFill>
+                <a:latin typeface="Segoe UI"/>
+              </a:rPr>
+              <a:t>ФГУП «</a:t>
+            </a:r>
+            <a:r>
+              <a:rPr lang="ru-RU" sz="1400" dirty="0" err="1">
+                <a:solidFill>
+                  <a:srgbClr val="1B2140"/>
+                </a:solidFill>
+                <a:latin typeface="Segoe UI"/>
+              </a:rPr>
+              <a:t>ЗащитаИнфоТранс</a:t>
+            </a:r>
+            <a:r>
+              <a:rPr lang="ru-RU" sz="1400" dirty="0">
+                <a:solidFill>
+                  <a:srgbClr val="1B2140"/>
+                </a:solidFill>
+                <a:latin typeface="Segoe UI"/>
+              </a:rPr>
+              <a:t>»: импортозамещение ИС АСП, реестр отечественного ПО</a:t>
             </a:r>
           </a:p>
         </p:txBody>
@@ -4687,7 +5172,7 @@
         <p:spPr>
           <a:xfrm>
             <a:off x="5007864" y="4864608"/>
-            <a:ext cx="2429255" cy="347472"/>
+            <a:ext cx="2429255" cy="739818"/>
           </a:xfrm>
           <a:prstGeom prst="rect">
             <a:avLst/>
@@ -4700,35 +5185,140 @@
           </a:bodyPr>
           <a:lstStyle/>
           <a:p>
+            <a:pPr>
+              <a:lnSpc>
+                <a:spcPct val="118000"/>
+              </a:lnSpc>
+            </a:pPr>
+            <a:r>
+              <a:rPr lang="ru-RU" sz="1400" dirty="0">
+                <a:solidFill>
+                  <a:srgbClr val="1B2140"/>
+                </a:solidFill>
+                <a:latin typeface="Segoe UI"/>
+              </a:rPr>
+              <a:t>Собственная студия разработки: команда 4 → 15 человек, 50</a:t>
+            </a:r>
+            <a:r>
+              <a:rPr lang="en-US" sz="1400" dirty="0">
+                <a:solidFill>
+                  <a:srgbClr val="1B2140"/>
+                </a:solidFill>
+                <a:latin typeface="Segoe UI"/>
+              </a:rPr>
+              <a:t>+</a:t>
+            </a:r>
+            <a:r>
+              <a:rPr lang="ru-RU" sz="1400" dirty="0">
+                <a:solidFill>
+                  <a:srgbClr val="1B2140"/>
+                </a:solidFill>
+                <a:latin typeface="Segoe UI"/>
+              </a:rPr>
+              <a:t> проектов</a:t>
+            </a:r>
+          </a:p>
+        </p:txBody>
+      </p:sp>
+      <p:sp>
+        <p:nvSpPr>
+          <p:cNvPr id="36" name="TextBox 35"/>
+          <p:cNvSpPr txBox="1"/>
+          <p:nvPr/>
+        </p:nvSpPr>
+        <p:spPr>
+          <a:xfrm>
+            <a:off x="640080" y="6510528"/>
+            <a:ext cx="2743200" cy="237744"/>
+          </a:xfrm>
+          <a:prstGeom prst="rect">
+            <a:avLst/>
+          </a:prstGeom>
+          <a:noFill/>
+        </p:spPr>
+        <p:txBody>
+          <a:bodyPr wrap="square" lIns="0" tIns="0" rIns="0" bIns="0" anchor="t">
+            <a:spAutoFit/>
+          </a:bodyPr>
+          <a:lstStyle/>
+          <a:p>
             <a:pPr algn="l">
               <a:lnSpc>
-                <a:spcPct val="118000"/>
+                <a:spcPct val="116000"/>
               </a:lnSpc>
               <a:spcAft>
                 <a:spcPts val="0"/>
               </a:spcAft>
             </a:pPr>
             <a:r>
-              <a:rPr sz="1400" b="0" i="0">
-                <a:solidFill>
-                  <a:srgbClr val="1B2140"/>
-                </a:solidFill>
-                <a:latin typeface="Segoe UI"/>
-              </a:rPr>
-              <a:t>МГУ им. Ломоносова</a:t>
-            </a:r>
-          </a:p>
-        </p:txBody>
-      </p:sp>
-      <p:sp>
-        <p:nvSpPr>
-          <p:cNvPr id="26" name="Rounded Rectangle 25"/>
+              <a:rPr sz="900" b="0" i="0">
+                <a:solidFill>
+                  <a:srgbClr val="6B7699"/>
+                </a:solidFill>
+                <a:latin typeface="Segoe UI Semibold"/>
+              </a:rPr>
+              <a:t>Ситалл</a:t>
+            </a:r>
+          </a:p>
+        </p:txBody>
+      </p:sp>
+      <p:sp>
+        <p:nvSpPr>
+          <p:cNvPr id="37" name="TextBox 36"/>
+          <p:cNvSpPr txBox="1"/>
+          <p:nvPr/>
+        </p:nvSpPr>
+        <p:spPr>
+          <a:xfrm>
+            <a:off x="10268712" y="6510528"/>
+            <a:ext cx="1280160" cy="237744"/>
+          </a:xfrm>
+          <a:prstGeom prst="rect">
+            <a:avLst/>
+          </a:prstGeom>
+          <a:noFill/>
+        </p:spPr>
+        <p:txBody>
+          <a:bodyPr wrap="square" lIns="0" tIns="0" rIns="0" bIns="0" anchor="t">
+            <a:spAutoFit/>
+          </a:bodyPr>
+          <a:lstStyle/>
+          <a:p>
+            <a:pPr algn="r">
+              <a:lnSpc>
+                <a:spcPct val="116000"/>
+              </a:lnSpc>
+              <a:spcAft>
+                <a:spcPts val="0"/>
+              </a:spcAft>
+            </a:pPr>
+            <a:r>
+              <a:rPr sz="900" b="0" i="0">
+                <a:solidFill>
+                  <a:srgbClr val="6B7699"/>
+                </a:solidFill>
+                <a:latin typeface="Segoe UI"/>
+              </a:rPr>
+              <a:t>10 / 11</a:t>
+            </a:r>
+          </a:p>
+        </p:txBody>
+      </p:sp>
+      <p:sp>
+        <p:nvSpPr>
+          <p:cNvPr id="38" name="Rounded Rectangle 4">
+            <a:extLst>
+              <a:ext uri="{FF2B5EF4-FFF2-40B4-BE49-F238E27FC236}">
+                <a16:creationId xmlns:a16="http://schemas.microsoft.com/office/drawing/2014/main" id="{40F1853A-45E9-5CB5-2042-609723A072AD}"/>
+              </a:ext>
+            </a:extLst>
+          </p:cNvPr>
           <p:cNvSpPr/>
           <p:nvPr/>
         </p:nvSpPr>
         <p:spPr>
           <a:xfrm>
-            <a:off x="8132063" y="1737360"/>
+            <a:off x="8168639" y="1738284"/>
             <a:ext cx="3416807" cy="4114800"/>
           </a:xfrm>
           <a:prstGeom prst="roundRect">
@@ -4765,19 +5355,25 @@
           <a:lstStyle/>
           <a:p>
             <a:pPr algn="ctr"/>
-            <a:endParaRPr/>
-          </a:p>
-        </p:txBody>
-      </p:sp>
-      <p:sp>
-        <p:nvSpPr>
-          <p:cNvPr id="27" name="Rounded Rectangle 26"/>
+            <a:endParaRPr dirty="0"/>
+          </a:p>
+        </p:txBody>
+      </p:sp>
+      <p:sp>
+        <p:nvSpPr>
+          <p:cNvPr id="39" name="Rounded Rectangle 5">
+            <a:extLst>
+              <a:ext uri="{FF2B5EF4-FFF2-40B4-BE49-F238E27FC236}">
+                <a16:creationId xmlns:a16="http://schemas.microsoft.com/office/drawing/2014/main" id="{A853D851-5CB3-1FE4-F891-0C3198578E3C}"/>
+              </a:ext>
+            </a:extLst>
+          </p:cNvPr>
           <p:cNvSpPr/>
           <p:nvPr/>
         </p:nvSpPr>
         <p:spPr>
           <a:xfrm>
-            <a:off x="8200643" y="1805939"/>
+            <a:off x="8238847" y="1805939"/>
             <a:ext cx="3279648" cy="3977639"/>
           </a:xfrm>
           <a:prstGeom prst="roundRect">
@@ -4818,20 +5414,26 @@
       </p:sp>
       <p:sp>
         <p:nvSpPr>
-          <p:cNvPr id="28" name="Rectangle 27"/>
+          <p:cNvPr id="40" name="Rectangle 6">
+            <a:extLst>
+              <a:ext uri="{FF2B5EF4-FFF2-40B4-BE49-F238E27FC236}">
+                <a16:creationId xmlns:a16="http://schemas.microsoft.com/office/drawing/2014/main" id="{AFC45264-CD99-33D3-9054-3943E91E3189}"/>
+              </a:ext>
+            </a:extLst>
+          </p:cNvPr>
           <p:cNvSpPr/>
           <p:nvPr/>
         </p:nvSpPr>
         <p:spPr>
           <a:xfrm>
-            <a:off x="8497824" y="2048256"/>
+            <a:off x="8536028" y="2048256"/>
             <a:ext cx="402336" cy="41148"/>
           </a:xfrm>
           <a:prstGeom prst="rect">
             <a:avLst/>
           </a:prstGeom>
           <a:solidFill>
-            <a:srgbClr val="C9D3EA"/>
+            <a:srgbClr val="C9A24B"/>
           </a:solidFill>
           <a:ln>
             <a:noFill/>
@@ -4863,14 +5465,20 @@
       </p:sp>
       <p:sp>
         <p:nvSpPr>
-          <p:cNvPr id="29" name="TextBox 28"/>
+          <p:cNvPr id="41" name="TextBox 40">
+            <a:extLst>
+              <a:ext uri="{FF2B5EF4-FFF2-40B4-BE49-F238E27FC236}">
+                <a16:creationId xmlns:a16="http://schemas.microsoft.com/office/drawing/2014/main" id="{98CE23EA-9960-7F50-ABF3-BF2CD7FE6980}"/>
+              </a:ext>
+            </a:extLst>
+          </p:cNvPr>
           <p:cNvSpPr txBox="1"/>
           <p:nvPr/>
         </p:nvSpPr>
         <p:spPr>
           <a:xfrm>
-            <a:off x="8497824" y="2286000"/>
-            <a:ext cx="2685288" cy="274320"/>
+            <a:off x="8536027" y="2123053"/>
+            <a:ext cx="3051047" cy="785280"/>
           </a:xfrm>
           <a:prstGeom prst="rect">
             <a:avLst/>
@@ -4892,33 +5500,108 @@
               </a:spcAft>
             </a:pPr>
             <a:r>
-              <a:rPr sz="1200" b="0" i="0" spc="200">
-                <a:solidFill>
-                  <a:srgbClr val="6B7699"/>
+              <a:rPr lang="ru-RU" sz="2300" b="0" i="0" dirty="0">
+                <a:solidFill>
+                  <a:srgbClr val="1E2761"/>
                 </a:solidFill>
                 <a:latin typeface="Segoe UI Semibold"/>
               </a:rPr>
-              <a:t>ПАРТНЁР ПРОЕКТА В РЕГИОНЕ</a:t>
-            </a:r>
-          </a:p>
-        </p:txBody>
-      </p:sp>
-      <p:sp>
-        <p:nvSpPr>
-          <p:cNvPr id="30" name="Oval 29"/>
+              <a:t>Дмитрий </a:t>
+            </a:r>
+            <a:r>
+              <a:rPr lang="ru-RU" sz="2300" b="0" i="0" dirty="0" err="1">
+                <a:solidFill>
+                  <a:srgbClr val="1E2761"/>
+                </a:solidFill>
+                <a:latin typeface="Segoe UI Semibold"/>
+              </a:rPr>
+              <a:t>Пересторонин</a:t>
+            </a:r>
+            <a:endParaRPr sz="2300" b="0" i="0" dirty="0">
+              <a:solidFill>
+                <a:srgbClr val="1E2761"/>
+              </a:solidFill>
+              <a:latin typeface="Segoe UI Semibold"/>
+            </a:endParaRPr>
+          </a:p>
+        </p:txBody>
+      </p:sp>
+      <p:sp>
+        <p:nvSpPr>
+          <p:cNvPr id="42" name="TextBox 41">
+            <a:extLst>
+              <a:ext uri="{FF2B5EF4-FFF2-40B4-BE49-F238E27FC236}">
+                <a16:creationId xmlns:a16="http://schemas.microsoft.com/office/drawing/2014/main" id="{BDBDE8C4-AC74-722C-0419-AA5B0D282960}"/>
+              </a:ext>
+            </a:extLst>
+          </p:cNvPr>
+          <p:cNvSpPr txBox="1"/>
+          <p:nvPr/>
+        </p:nvSpPr>
+        <p:spPr>
+          <a:xfrm>
+            <a:off x="8536027" y="2968314"/>
+            <a:ext cx="2685288" cy="195503"/>
+          </a:xfrm>
+          <a:prstGeom prst="rect">
+            <a:avLst/>
+          </a:prstGeom>
+          <a:noFill/>
+        </p:spPr>
+        <p:txBody>
+          <a:bodyPr wrap="square" lIns="0" tIns="0" rIns="0" bIns="0" anchor="t">
+            <a:spAutoFit/>
+          </a:bodyPr>
+          <a:lstStyle/>
+          <a:p>
+            <a:pPr algn="l">
+              <a:lnSpc>
+                <a:spcPct val="116000"/>
+              </a:lnSpc>
+              <a:spcAft>
+                <a:spcPts val="0"/>
+              </a:spcAft>
+            </a:pPr>
+            <a:r>
+              <a:rPr lang="ru-RU" sz="1200" spc="200" dirty="0">
+                <a:solidFill>
+                  <a:srgbClr val="C9A24B"/>
+                </a:solidFill>
+                <a:latin typeface="Segoe UI Semibold"/>
+              </a:rPr>
+              <a:t>Региональный партнер</a:t>
+            </a:r>
+            <a:endParaRPr sz="1200" b="0" i="0" spc="200" dirty="0">
+              <a:solidFill>
+                <a:srgbClr val="C9A24B"/>
+              </a:solidFill>
+              <a:latin typeface="Segoe UI Semibold"/>
+            </a:endParaRPr>
+          </a:p>
+        </p:txBody>
+      </p:sp>
+      <p:sp>
+        <p:nvSpPr>
+          <p:cNvPr id="43" name="Oval 9">
+            <a:extLst>
+              <a:ext uri="{FF2B5EF4-FFF2-40B4-BE49-F238E27FC236}">
+                <a16:creationId xmlns:a16="http://schemas.microsoft.com/office/drawing/2014/main" id="{A22D4B98-92EB-BE5E-4996-7FE9D32978B9}"/>
+              </a:ext>
+            </a:extLst>
+          </p:cNvPr>
           <p:cNvSpPr/>
           <p:nvPr/>
         </p:nvSpPr>
         <p:spPr>
           <a:xfrm>
-            <a:off x="8497824" y="3374136"/>
+            <a:off x="8536028" y="3374136"/>
             <a:ext cx="82296" cy="82296"/>
           </a:xfrm>
           <a:prstGeom prst="ellipse">
             <a:avLst/>
           </a:prstGeom>
           <a:solidFill>
-            <a:srgbClr val="C9D3EA"/>
+            <a:srgbClr val="1E2761"/>
           </a:solidFill>
           <a:ln>
             <a:noFill/>
@@ -4950,14 +5633,71 @@
       </p:sp>
       <p:sp>
         <p:nvSpPr>
-          <p:cNvPr id="31" name="TextBox 30"/>
+          <p:cNvPr id="47" name="Oval 13">
+            <a:extLst>
+              <a:ext uri="{FF2B5EF4-FFF2-40B4-BE49-F238E27FC236}">
+                <a16:creationId xmlns:a16="http://schemas.microsoft.com/office/drawing/2014/main" id="{6622D2A2-6752-4402-3CFF-BFF857084E69}"/>
+              </a:ext>
+            </a:extLst>
+          </p:cNvPr>
+          <p:cNvSpPr/>
+          <p:nvPr/>
+        </p:nvSpPr>
+        <p:spPr>
+          <a:xfrm flipV="1">
+            <a:off x="8536825" y="4581192"/>
+            <a:ext cx="82296" cy="82296"/>
+          </a:xfrm>
+          <a:prstGeom prst="ellipse">
+            <a:avLst/>
+          </a:prstGeom>
+          <a:solidFill>
+            <a:srgbClr val="1E2761"/>
+          </a:solidFill>
+          <a:ln>
+            <a:noFill/>
+          </a:ln>
+          <a:effectLst/>
+        </p:spPr>
+        <p:style>
+          <a:lnRef idx="1">
+            <a:schemeClr val="accent1"/>
+          </a:lnRef>
+          <a:fillRef idx="3">
+            <a:schemeClr val="accent1"/>
+          </a:fillRef>
+          <a:effectRef idx="2">
+            <a:schemeClr val="accent1"/>
+          </a:effectRef>
+          <a:fontRef idx="minor">
+            <a:schemeClr val="lt1"/>
+          </a:fontRef>
+        </p:style>
+        <p:txBody>
+          <a:bodyPr rtlCol="0" anchor="ctr"/>
+          <a:lstStyle/>
+          <a:p>
+            <a:pPr algn="ctr"/>
+            <a:endParaRPr/>
+          </a:p>
+        </p:txBody>
+      </p:sp>
+      <p:sp>
+        <p:nvSpPr>
+          <p:cNvPr id="49" name="TextBox 48">
+            <a:extLst>
+              <a:ext uri="{FF2B5EF4-FFF2-40B4-BE49-F238E27FC236}">
+                <a16:creationId xmlns:a16="http://schemas.microsoft.com/office/drawing/2014/main" id="{96CD5985-73DB-B242-3BFD-C9A9B7858B1B}"/>
+              </a:ext>
+            </a:extLst>
+          </p:cNvPr>
           <p:cNvSpPr txBox="1"/>
           <p:nvPr/>
         </p:nvSpPr>
         <p:spPr>
           <a:xfrm>
-            <a:off x="8753856" y="3255264"/>
-            <a:ext cx="2429255" cy="603504"/>
+            <a:off x="8794878" y="3267049"/>
+            <a:ext cx="2753867" cy="994055"/>
           </a:xfrm>
           <a:prstGeom prst="rect">
             <a:avLst/>
@@ -4979,107 +5719,17 @@
               </a:spcAft>
             </a:pPr>
             <a:r>
-              <a:rPr sz="1400" b="0" i="0" dirty="0" err="1">
-                <a:solidFill>
-                  <a:srgbClr val="6B7699"/>
-                </a:solidFill>
-                <a:latin typeface="Segoe UI"/>
-              </a:rPr>
-              <a:t>Место</a:t>
-            </a:r>
-            <a:r>
-              <a:rPr sz="1400" b="0" i="0" dirty="0">
-                <a:solidFill>
-                  <a:srgbClr val="6B7699"/>
-                </a:solidFill>
-                <a:latin typeface="Segoe UI"/>
-              </a:rPr>
-              <a:t> </a:t>
-            </a:r>
-            <a:r>
-              <a:rPr sz="1400" b="0" i="0" dirty="0" err="1">
-                <a:solidFill>
-                  <a:srgbClr val="6B7699"/>
-                </a:solidFill>
-                <a:latin typeface="Segoe UI"/>
-              </a:rPr>
-              <a:t>для</a:t>
-            </a:r>
-            <a:r>
-              <a:rPr sz="1400" b="0" i="0" dirty="0">
-                <a:solidFill>
-                  <a:srgbClr val="6B7699"/>
-                </a:solidFill>
-                <a:latin typeface="Segoe UI"/>
-              </a:rPr>
-              <a:t> </a:t>
-            </a:r>
-            <a:r>
-              <a:rPr sz="1400" b="0" i="0" dirty="0" err="1">
-                <a:solidFill>
-                  <a:srgbClr val="6B7699"/>
-                </a:solidFill>
-                <a:latin typeface="Segoe UI"/>
-              </a:rPr>
-              <a:t>партнёра</a:t>
-            </a:r>
-            <a:r>
-              <a:rPr sz="1400" b="0" i="0" dirty="0">
-                <a:solidFill>
-                  <a:srgbClr val="6B7699"/>
-                </a:solidFill>
-                <a:latin typeface="Segoe UI"/>
-              </a:rPr>
-              <a:t>, </a:t>
-            </a:r>
-            <a:r>
-              <a:rPr sz="1400" b="0" i="0" dirty="0" err="1">
-                <a:solidFill>
-                  <a:srgbClr val="6B7699"/>
-                </a:solidFill>
-                <a:latin typeface="Segoe UI"/>
-              </a:rPr>
-              <a:t>который</a:t>
-            </a:r>
-            <a:r>
-              <a:rPr sz="1400" b="0" i="0" dirty="0">
-                <a:solidFill>
-                  <a:srgbClr val="6B7699"/>
-                </a:solidFill>
-                <a:latin typeface="Segoe UI"/>
-              </a:rPr>
-              <a:t> </a:t>
-            </a:r>
-            <a:r>
-              <a:rPr sz="1400" b="0" i="0" dirty="0" err="1">
-                <a:solidFill>
-                  <a:srgbClr val="6B7699"/>
-                </a:solidFill>
-                <a:latin typeface="Segoe UI"/>
-              </a:rPr>
-              <a:t>открывает</a:t>
-            </a:r>
-            <a:r>
-              <a:rPr sz="1400" b="0" i="0" dirty="0">
-                <a:solidFill>
-                  <a:srgbClr val="6B7699"/>
-                </a:solidFill>
-                <a:latin typeface="Segoe UI"/>
-              </a:rPr>
-              <a:t> </a:t>
-            </a:r>
-            <a:r>
-              <a:rPr sz="1400" b="0" i="0" dirty="0" err="1">
-                <a:solidFill>
-                  <a:srgbClr val="6B7699"/>
-                </a:solidFill>
-                <a:latin typeface="Segoe UI"/>
-              </a:rPr>
-              <a:t>проект</a:t>
+              <a:rPr lang="ru-RU" sz="1400" dirty="0">
+                <a:solidFill>
+                  <a:srgbClr val="1B2140"/>
+                </a:solidFill>
+                <a:latin typeface="Segoe UI"/>
+              </a:rPr>
+              <a:t>Привлечение спонсирования для спортивных мероприятий федерального и международного уровня</a:t>
             </a:r>
             <a:endParaRPr sz="1400" b="0" i="0" dirty="0">
               <a:solidFill>
-                <a:srgbClr val="6B7699"/>
+                <a:srgbClr val="1B2140"/>
               </a:solidFill>
               <a:latin typeface="Segoe UI"/>
             </a:endParaRPr>
@@ -5088,59 +5738,20 @@
       </p:sp>
       <p:sp>
         <p:nvSpPr>
-          <p:cNvPr id="32" name="Oval 31"/>
-          <p:cNvSpPr/>
-          <p:nvPr/>
-        </p:nvSpPr>
-        <p:spPr>
-          <a:xfrm>
-            <a:off x="8497824" y="4178808"/>
-            <a:ext cx="82296" cy="82296"/>
-          </a:xfrm>
-          <a:prstGeom prst="ellipse">
-            <a:avLst/>
-          </a:prstGeom>
-          <a:solidFill>
-            <a:srgbClr val="C9D3EA"/>
-          </a:solidFill>
-          <a:ln>
-            <a:noFill/>
-          </a:ln>
-          <a:effectLst/>
-        </p:spPr>
-        <p:style>
-          <a:lnRef idx="1">
-            <a:schemeClr val="accent1"/>
-          </a:lnRef>
-          <a:fillRef idx="3">
-            <a:schemeClr val="accent1"/>
-          </a:fillRef>
-          <a:effectRef idx="2">
-            <a:schemeClr val="accent1"/>
-          </a:effectRef>
-          <a:fontRef idx="minor">
-            <a:schemeClr val="lt1"/>
-          </a:fontRef>
-        </p:style>
-        <p:txBody>
-          <a:bodyPr rtlCol="0" anchor="ctr"/>
-          <a:lstStyle/>
-          <a:p>
-            <a:pPr algn="ctr"/>
-            <a:endParaRPr/>
-          </a:p>
-        </p:txBody>
-      </p:sp>
-      <p:sp>
-        <p:nvSpPr>
-          <p:cNvPr id="33" name="TextBox 32"/>
+          <p:cNvPr id="50" name="TextBox 49">
+            <a:extLst>
+              <a:ext uri="{FF2B5EF4-FFF2-40B4-BE49-F238E27FC236}">
+                <a16:creationId xmlns:a16="http://schemas.microsoft.com/office/drawing/2014/main" id="{3AB79B5F-936F-BD63-BDAA-C5CCA96BA1C9}"/>
+              </a:ext>
+            </a:extLst>
+          </p:cNvPr>
           <p:cNvSpPr txBox="1"/>
           <p:nvPr/>
         </p:nvSpPr>
         <p:spPr>
           <a:xfrm>
-            <a:off x="8753856" y="4059936"/>
-            <a:ext cx="2429255" cy="603504"/>
+            <a:off x="8805499" y="4486452"/>
+            <a:ext cx="2753867" cy="994055"/>
           </a:xfrm>
           <a:prstGeom prst="rect">
             <a:avLst/>
@@ -5162,185 +5773,20 @@
               </a:spcAft>
             </a:pPr>
             <a:r>
-              <a:rPr sz="1400" b="0" i="0">
-                <a:solidFill>
-                  <a:srgbClr val="6B7699"/>
-                </a:solidFill>
-                <a:latin typeface="Segoe UI"/>
-              </a:rPr>
-              <a:t>Научная проверка: эксперты институтов под задачу</a:t>
-            </a:r>
-          </a:p>
-        </p:txBody>
-      </p:sp>
-      <p:sp>
-        <p:nvSpPr>
-          <p:cNvPr id="34" name="Oval 33"/>
-          <p:cNvSpPr/>
-          <p:nvPr/>
-        </p:nvSpPr>
-        <p:spPr>
-          <a:xfrm>
-            <a:off x="8497824" y="4983480"/>
-            <a:ext cx="82296" cy="82296"/>
-          </a:xfrm>
-          <a:prstGeom prst="ellipse">
-            <a:avLst/>
-          </a:prstGeom>
-          <a:solidFill>
-            <a:srgbClr val="C9D3EA"/>
-          </a:solidFill>
-          <a:ln>
-            <a:noFill/>
-          </a:ln>
-          <a:effectLst/>
-        </p:spPr>
-        <p:style>
-          <a:lnRef idx="1">
-            <a:schemeClr val="accent1"/>
-          </a:lnRef>
-          <a:fillRef idx="3">
-            <a:schemeClr val="accent1"/>
-          </a:fillRef>
-          <a:effectRef idx="2">
-            <a:schemeClr val="accent1"/>
-          </a:effectRef>
-          <a:fontRef idx="minor">
-            <a:schemeClr val="lt1"/>
-          </a:fontRef>
-        </p:style>
-        <p:txBody>
-          <a:bodyPr rtlCol="0" anchor="ctr"/>
-          <a:lstStyle/>
-          <a:p>
-            <a:pPr algn="ctr"/>
-            <a:endParaRPr/>
-          </a:p>
-        </p:txBody>
-      </p:sp>
-      <p:sp>
-        <p:nvSpPr>
-          <p:cNvPr id="35" name="TextBox 34"/>
-          <p:cNvSpPr txBox="1"/>
-          <p:nvPr/>
-        </p:nvSpPr>
-        <p:spPr>
-          <a:xfrm>
-            <a:off x="8753856" y="4864608"/>
-            <a:ext cx="2429255" cy="603504"/>
-          </a:xfrm>
-          <a:prstGeom prst="rect">
-            <a:avLst/>
-          </a:prstGeom>
-          <a:noFill/>
-        </p:spPr>
-        <p:txBody>
-          <a:bodyPr wrap="square" lIns="0" tIns="0" rIns="0" bIns="0" anchor="t">
-            <a:spAutoFit/>
-          </a:bodyPr>
-          <a:lstStyle/>
-          <a:p>
-            <a:pPr algn="l">
-              <a:lnSpc>
-                <a:spcPct val="118000"/>
-              </a:lnSpc>
-              <a:spcAft>
-                <a:spcPts val="0"/>
-              </a:spcAft>
-            </a:pPr>
-            <a:r>
-              <a:rPr sz="1400" b="0" i="0">
-                <a:solidFill>
-                  <a:srgbClr val="6B7699"/>
-                </a:solidFill>
-                <a:latin typeface="Segoe UI"/>
-              </a:rPr>
-              <a:t>Внедрение: инжиниринговые центры, ответственность на нас</a:t>
-            </a:r>
-          </a:p>
-        </p:txBody>
-      </p:sp>
-      <p:sp>
-        <p:nvSpPr>
-          <p:cNvPr id="36" name="TextBox 35"/>
-          <p:cNvSpPr txBox="1"/>
-          <p:nvPr/>
-        </p:nvSpPr>
-        <p:spPr>
-          <a:xfrm>
-            <a:off x="640080" y="6510528"/>
-            <a:ext cx="2743200" cy="237744"/>
-          </a:xfrm>
-          <a:prstGeom prst="rect">
-            <a:avLst/>
-          </a:prstGeom>
-          <a:noFill/>
-        </p:spPr>
-        <p:txBody>
-          <a:bodyPr wrap="square" lIns="0" tIns="0" rIns="0" bIns="0" anchor="t">
-            <a:spAutoFit/>
-          </a:bodyPr>
-          <a:lstStyle/>
-          <a:p>
-            <a:pPr algn="l">
-              <a:lnSpc>
-                <a:spcPct val="116000"/>
-              </a:lnSpc>
-              <a:spcAft>
-                <a:spcPts val="0"/>
-              </a:spcAft>
-            </a:pPr>
-            <a:r>
-              <a:rPr sz="900" b="0" i="0">
-                <a:solidFill>
-                  <a:srgbClr val="6B7699"/>
-                </a:solidFill>
-                <a:latin typeface="Segoe UI Semibold"/>
-              </a:rPr>
-              <a:t>Ситалл</a:t>
-            </a:r>
-          </a:p>
-        </p:txBody>
-      </p:sp>
-      <p:sp>
-        <p:nvSpPr>
-          <p:cNvPr id="37" name="TextBox 36"/>
-          <p:cNvSpPr txBox="1"/>
-          <p:nvPr/>
-        </p:nvSpPr>
-        <p:spPr>
-          <a:xfrm>
-            <a:off x="10268712" y="6510528"/>
-            <a:ext cx="1280160" cy="237744"/>
-          </a:xfrm>
-          <a:prstGeom prst="rect">
-            <a:avLst/>
-          </a:prstGeom>
-          <a:noFill/>
-        </p:spPr>
-        <p:txBody>
-          <a:bodyPr wrap="square" lIns="0" tIns="0" rIns="0" bIns="0" anchor="t">
-            <a:spAutoFit/>
-          </a:bodyPr>
-          <a:lstStyle/>
-          <a:p>
-            <a:pPr algn="r">
-              <a:lnSpc>
-                <a:spcPct val="116000"/>
-              </a:lnSpc>
-              <a:spcAft>
-                <a:spcPts val="0"/>
-              </a:spcAft>
-            </a:pPr>
-            <a:r>
-              <a:rPr sz="900" b="0" i="0">
-                <a:solidFill>
-                  <a:srgbClr val="6B7699"/>
-                </a:solidFill>
-                <a:latin typeface="Segoe UI"/>
-              </a:rPr>
-              <a:t>10 / 11</a:t>
-            </a:r>
+              <a:rPr lang="ru-RU" sz="1400" dirty="0">
+                <a:solidFill>
+                  <a:srgbClr val="1B2140"/>
+                </a:solidFill>
+                <a:latin typeface="Segoe UI"/>
+              </a:rPr>
+              <a:t>Инициатор проектов по созданию и развитию новых индустриальных парков в Свердловской области</a:t>
+            </a:r>
+            <a:endParaRPr sz="1400" b="0" i="0" dirty="0">
+              <a:solidFill>
+                <a:srgbClr val="1B2140"/>
+              </a:solidFill>
+              <a:latin typeface="Segoe UI"/>
+            </a:endParaRPr>
           </a:p>
         </p:txBody>
       </p:sp>
@@ -6385,14 +6831,65 @@
               </a:spcAft>
             </a:pPr>
             <a:r>
-              <a:rPr sz="1700" b="0" i="0">
+              <a:rPr sz="1700" b="0" i="0" dirty="0">
                 <a:solidFill>
                   <a:srgbClr val="1E2761"/>
                 </a:solidFill>
                 <a:latin typeface="Segoe UI Semibold"/>
               </a:rPr>
-              <a:t>Расходов областного бюджета нет</a:t>
-            </a:r>
+              <a:t>Расходов </a:t>
+            </a:r>
+            <a:r>
+              <a:rPr sz="1700" b="0" i="0" dirty="0" err="1">
+                <a:solidFill>
+                  <a:srgbClr val="1E2761"/>
+                </a:solidFill>
+                <a:latin typeface="Segoe UI Semibold"/>
+              </a:rPr>
+              <a:t>областного</a:t>
+            </a:r>
+            <a:r>
+              <a:rPr sz="1700" b="0" i="0" dirty="0">
+                <a:solidFill>
+                  <a:srgbClr val="1E2761"/>
+                </a:solidFill>
+                <a:latin typeface="Segoe UI Semibold"/>
+              </a:rPr>
+              <a:t> </a:t>
+            </a:r>
+            <a:r>
+              <a:rPr sz="1700" b="0" i="0" dirty="0" err="1">
+                <a:solidFill>
+                  <a:srgbClr val="1E2761"/>
+                </a:solidFill>
+                <a:latin typeface="Segoe UI Semibold"/>
+              </a:rPr>
+              <a:t>бюджета</a:t>
+            </a:r>
+            <a:r>
+              <a:rPr sz="1700" b="0" i="0" dirty="0">
+                <a:solidFill>
+                  <a:srgbClr val="1E2761"/>
+                </a:solidFill>
+                <a:latin typeface="Segoe UI Semibold"/>
+              </a:rPr>
+              <a:t> </a:t>
+            </a:r>
+            <a:r>
+              <a:rPr sz="1700" b="0" i="0" dirty="0" err="1">
+                <a:solidFill>
+                  <a:srgbClr val="1E2761"/>
+                </a:solidFill>
+                <a:latin typeface="Segoe UI Semibold"/>
+              </a:rPr>
+              <a:t>нет</a:t>
+            </a:r>
+            <a:endParaRPr sz="1700" b="0" i="0" dirty="0">
+              <a:solidFill>
+                <a:srgbClr val="1E2761"/>
+              </a:solidFill>
+              <a:latin typeface="Segoe UI Semibold"/>
+            </a:endParaRPr>
           </a:p>
         </p:txBody>
       </p:sp>
@@ -6491,7 +6988,7 @@
         </p:nvSpPr>
         <p:spPr>
           <a:xfrm>
-            <a:off x="6696699" y="2185415"/>
+            <a:off x="6696699" y="2153516"/>
             <a:ext cx="420624" cy="420624"/>
           </a:xfrm>
           <a:prstGeom prst="rect">
@@ -6514,7 +7011,7 @@
               </a:spcAft>
             </a:pPr>
             <a:r>
-              <a:rPr sz="1600" b="0" i="0">
+              <a:rPr sz="1600" b="0" i="0" dirty="0">
                 <a:solidFill>
                   <a:srgbClr val="FFFFFF"/>
                 </a:solidFill>
@@ -6644,7 +7141,7 @@
         </p:nvSpPr>
         <p:spPr>
           <a:xfrm>
-            <a:off x="6696699" y="2788919"/>
+            <a:off x="6707332" y="2757020"/>
             <a:ext cx="420624" cy="420624"/>
           </a:xfrm>
           <a:prstGeom prst="rect">
@@ -6667,7 +7164,7 @@
               </a:spcAft>
             </a:pPr>
             <a:r>
-              <a:rPr sz="1600" b="0" i="0">
+              <a:rPr sz="1600" b="0" i="0" dirty="0">
                 <a:solidFill>
                   <a:srgbClr val="FFFFFF"/>
                 </a:solidFill>
@@ -6815,7 +7312,7 @@
         </p:nvSpPr>
         <p:spPr>
           <a:xfrm>
-            <a:off x="6696699" y="3666744"/>
+            <a:off x="6707332" y="3634845"/>
             <a:ext cx="420624" cy="420624"/>
           </a:xfrm>
           <a:prstGeom prst="rect">
@@ -6838,7 +7335,7 @@
               </a:spcAft>
             </a:pPr>
             <a:r>
-              <a:rPr sz="1600" b="0" i="0">
+              <a:rPr sz="1600" b="0" i="0" dirty="0">
                 <a:solidFill>
                   <a:srgbClr val="FFFFFF"/>
                 </a:solidFill>
@@ -7053,7 +7550,7 @@
         <p:spPr>
           <a:xfrm>
             <a:off x="640080" y="640080"/>
-            <a:ext cx="10908792" cy="685800"/>
+            <a:ext cx="10908792" cy="461665"/>
           </a:xfrm>
           <a:prstGeom prst="rect">
             <a:avLst/>
@@ -7075,14 +7572,128 @@
               </a:spcAft>
             </a:pPr>
             <a:r>
-              <a:rPr sz="3000" b="0" i="0">
+              <a:rPr sz="3000" b="0" i="0" dirty="0" err="1">
                 <a:solidFill>
                   <a:srgbClr val="1E2761"/>
                 </a:solidFill>
                 <a:latin typeface="Segoe UI Semibold"/>
               </a:rPr>
-              <a:t>Деньги на науку есть. Внедрять их некому</a:t>
-            </a:r>
+              <a:t>Деньги</a:t>
+            </a:r>
+            <a:r>
+              <a:rPr sz="3000" b="0" i="0" dirty="0">
+                <a:solidFill>
+                  <a:srgbClr val="1E2761"/>
+                </a:solidFill>
+                <a:latin typeface="Segoe UI Semibold"/>
+              </a:rPr>
+              <a:t> </a:t>
+            </a:r>
+            <a:r>
+              <a:rPr sz="3000" b="0" i="0" dirty="0" err="1">
+                <a:solidFill>
+                  <a:srgbClr val="1E2761"/>
+                </a:solidFill>
+                <a:latin typeface="Segoe UI Semibold"/>
+              </a:rPr>
+              <a:t>на</a:t>
+            </a:r>
+            <a:r>
+              <a:rPr sz="3000" b="0" i="0" dirty="0">
+                <a:solidFill>
+                  <a:srgbClr val="1E2761"/>
+                </a:solidFill>
+                <a:latin typeface="Segoe UI Semibold"/>
+              </a:rPr>
+              <a:t> </a:t>
+            </a:r>
+            <a:r>
+              <a:rPr sz="3000" b="0" i="0" dirty="0" err="1">
+                <a:solidFill>
+                  <a:srgbClr val="1E2761"/>
+                </a:solidFill>
+                <a:latin typeface="Segoe UI Semibold"/>
+              </a:rPr>
+              <a:t>науку</a:t>
+            </a:r>
+            <a:r>
+              <a:rPr sz="3000" b="0" i="0" dirty="0">
+                <a:solidFill>
+                  <a:srgbClr val="1E2761"/>
+                </a:solidFill>
+                <a:latin typeface="Segoe UI Semibold"/>
+              </a:rPr>
+              <a:t> </a:t>
+            </a:r>
+            <a:r>
+              <a:rPr sz="3000" b="0" i="0" dirty="0" err="1">
+                <a:solidFill>
+                  <a:srgbClr val="1E2761"/>
+                </a:solidFill>
+                <a:latin typeface="Segoe UI Semibold"/>
+              </a:rPr>
+              <a:t>есть</a:t>
+            </a:r>
+            <a:r>
+              <a:rPr sz="3000" b="0" i="0" dirty="0">
+                <a:solidFill>
+                  <a:srgbClr val="1E2761"/>
+                </a:solidFill>
+                <a:latin typeface="Segoe UI Semibold"/>
+              </a:rPr>
+              <a:t>. </a:t>
+            </a:r>
+            <a:r>
+              <a:rPr sz="3000" b="0" i="0" dirty="0" err="1">
+                <a:solidFill>
+                  <a:srgbClr val="1E2761"/>
+                </a:solidFill>
+                <a:latin typeface="Segoe UI Semibold"/>
+              </a:rPr>
+              <a:t>Внедрять</a:t>
+            </a:r>
+            <a:r>
+              <a:rPr sz="3000" b="0" i="0" dirty="0">
+                <a:solidFill>
+                  <a:srgbClr val="1E2761"/>
+                </a:solidFill>
+                <a:latin typeface="Segoe UI Semibold"/>
+              </a:rPr>
+              <a:t> </a:t>
+            </a:r>
+            <a:r>
+              <a:rPr lang="ru-RU" sz="3000" dirty="0">
+                <a:solidFill>
+                  <a:srgbClr val="1E2761"/>
+                </a:solidFill>
+                <a:latin typeface="Segoe UI Semibold"/>
+              </a:rPr>
+              <a:t>технологии</a:t>
+            </a:r>
+            <a:r>
+              <a:rPr sz="3000" b="0" i="0" dirty="0">
+                <a:solidFill>
+                  <a:srgbClr val="1E2761"/>
+                </a:solidFill>
+                <a:latin typeface="Segoe UI Semibold"/>
+              </a:rPr>
+              <a:t> </a:t>
+            </a:r>
+            <a:r>
+              <a:rPr sz="3000" b="0" i="0" dirty="0" err="1">
+                <a:solidFill>
+                  <a:srgbClr val="1E2761"/>
+                </a:solidFill>
+                <a:latin typeface="Segoe UI Semibold"/>
+              </a:rPr>
+              <a:t>некому</a:t>
+            </a:r>
+            <a:endParaRPr sz="3000" b="0" i="0" dirty="0">
+              <a:solidFill>
+                <a:srgbClr val="1E2761"/>
+              </a:solidFill>
+              <a:latin typeface="Segoe UI Semibold"/>
+            </a:endParaRPr>
           </a:p>
         </p:txBody>
       </p:sp>
@@ -7303,7 +7914,7 @@
               </a:spcAft>
             </a:pPr>
             <a:r>
-              <a:rPr sz="5400" b="0" i="0">
+              <a:rPr sz="5400" b="0" i="0" dirty="0">
                 <a:solidFill>
                   <a:srgbClr val="1E2761"/>
                 </a:solidFill>
@@ -7323,7 +7934,7 @@
         <p:spPr>
           <a:xfrm>
             <a:off x="950976" y="3104388"/>
-            <a:ext cx="4640580" cy="274320"/>
+            <a:ext cx="4640580" cy="271806"/>
           </a:xfrm>
           <a:prstGeom prst="rect">
             <a:avLst/>
@@ -7336,23 +7947,134 @@
           </a:bodyPr>
           <a:lstStyle/>
           <a:p>
-            <a:pPr algn="l">
+            <a:pPr>
               <a:lnSpc>
                 <a:spcPct val="122000"/>
               </a:lnSpc>
-              <a:spcAft>
-                <a:spcPts val="0"/>
-              </a:spcAft>
             </a:pPr>
             <a:r>
-              <a:rPr sz="1600" b="0" i="0">
-                <a:solidFill>
-                  <a:srgbClr val="1B2140"/>
-                </a:solidFill>
-                <a:latin typeface="Segoe UI"/>
-              </a:rPr>
-              <a:t>затраты на науку к 2030 году. Сейчас около 1%</a:t>
-            </a:r>
+              <a:rPr lang="ru-RU" sz="1600" b="0" i="0" dirty="0">
+                <a:solidFill>
+                  <a:srgbClr val="1B2140"/>
+                </a:solidFill>
+                <a:latin typeface="Segoe UI"/>
+              </a:rPr>
+              <a:t>Цель по </a:t>
+            </a:r>
+            <a:r>
+              <a:rPr sz="1600" b="0" i="0" dirty="0" err="1">
+                <a:solidFill>
+                  <a:srgbClr val="1B2140"/>
+                </a:solidFill>
+                <a:latin typeface="Segoe UI"/>
+              </a:rPr>
+              <a:t>затрат</a:t>
+            </a:r>
+            <a:r>
+              <a:rPr lang="ru-RU" sz="1600" b="0" i="0" dirty="0" err="1">
+                <a:solidFill>
+                  <a:srgbClr val="1B2140"/>
+                </a:solidFill>
+                <a:latin typeface="Segoe UI"/>
+              </a:rPr>
+              <a:t>ам</a:t>
+            </a:r>
+            <a:r>
+              <a:rPr sz="1600" b="0" i="0" dirty="0">
+                <a:solidFill>
+                  <a:srgbClr val="1B2140"/>
+                </a:solidFill>
+                <a:latin typeface="Segoe UI"/>
+              </a:rPr>
+              <a:t> </a:t>
+            </a:r>
+            <a:r>
+              <a:rPr sz="1600" b="0" i="0" dirty="0" err="1">
+                <a:solidFill>
+                  <a:srgbClr val="1B2140"/>
+                </a:solidFill>
+                <a:latin typeface="Segoe UI"/>
+              </a:rPr>
+              <a:t>на</a:t>
+            </a:r>
+            <a:r>
+              <a:rPr sz="1600" b="0" i="0" dirty="0">
+                <a:solidFill>
+                  <a:srgbClr val="1B2140"/>
+                </a:solidFill>
+                <a:latin typeface="Segoe UI"/>
+              </a:rPr>
+              <a:t> </a:t>
+            </a:r>
+            <a:r>
+              <a:rPr sz="1600" b="0" i="0" dirty="0" err="1">
+                <a:solidFill>
+                  <a:srgbClr val="1B2140"/>
+                </a:solidFill>
+                <a:latin typeface="Segoe UI"/>
+              </a:rPr>
+              <a:t>науку</a:t>
+            </a:r>
+            <a:r>
+              <a:rPr sz="1600" b="0" i="0" dirty="0">
+                <a:solidFill>
+                  <a:srgbClr val="1B2140"/>
+                </a:solidFill>
+                <a:latin typeface="Segoe UI"/>
+              </a:rPr>
+              <a:t> </a:t>
+            </a:r>
+            <a:r>
+              <a:rPr sz="1600" b="0" i="0" dirty="0" err="1">
+                <a:solidFill>
+                  <a:srgbClr val="1B2140"/>
+                </a:solidFill>
+                <a:latin typeface="Segoe UI"/>
+              </a:rPr>
+              <a:t>к</a:t>
+            </a:r>
+            <a:r>
+              <a:rPr sz="1600" b="0" i="0" dirty="0">
+                <a:solidFill>
+                  <a:srgbClr val="1B2140"/>
+                </a:solidFill>
+                <a:latin typeface="Segoe UI"/>
+              </a:rPr>
+              <a:t> 2030 </a:t>
+            </a:r>
+            <a:r>
+              <a:rPr sz="1600" b="0" i="0" dirty="0" err="1">
+                <a:solidFill>
+                  <a:srgbClr val="1B2140"/>
+                </a:solidFill>
+                <a:latin typeface="Segoe UI"/>
+              </a:rPr>
+              <a:t>году</a:t>
+            </a:r>
+            <a:r>
+              <a:rPr sz="1600" b="0" i="0" dirty="0">
+                <a:solidFill>
+                  <a:srgbClr val="1B2140"/>
+                </a:solidFill>
+                <a:latin typeface="Segoe UI"/>
+              </a:rPr>
+              <a:t>.</a:t>
+            </a:r>
+            <a:r>
+              <a:rPr lang="ru-RU" sz="1600" dirty="0">
+                <a:solidFill>
+                  <a:srgbClr val="1B2140"/>
+                </a:solidFill>
+                <a:latin typeface="Segoe UI"/>
+              </a:rPr>
+              <a:t> </a:t>
+            </a:r>
+            <a:endParaRPr sz="1600" b="0" i="0" dirty="0">
+              <a:solidFill>
+                <a:srgbClr val="1B2140"/>
+              </a:solidFill>
+              <a:latin typeface="Segoe UI"/>
+            </a:endParaRPr>
           </a:p>
         </p:txBody>
       </p:sp>
@@ -7387,16 +8109,25 @@
               </a:spcAft>
             </a:pPr>
             <a:r>
-              <a:rPr sz="900" b="0" i="1">
+              <a:rPr sz="900" b="0" i="1" dirty="0" err="1">
                 <a:solidFill>
                   <a:srgbClr val="6B7699"/>
                 </a:solidFill>
                 <a:latin typeface="Segoe UI"/>
               </a:rPr>
-              <a:t>Источник: </a:t>
-            </a:r>
-            <a:r>
-              <a:rPr sz="900" b="0" i="1" u="sng">
+              <a:t>Источник</a:t>
+            </a:r>
+            <a:r>
+              <a:rPr sz="900" b="0" i="1" dirty="0">
+                <a:solidFill>
+                  <a:srgbClr val="6B7699"/>
+                </a:solidFill>
+                <a:latin typeface="Segoe UI"/>
+              </a:rPr>
+              <a:t>: </a:t>
+            </a:r>
+            <a:r>
+              <a:rPr sz="900" b="0" i="1" u="sng" dirty="0">
                 <a:solidFill>
                   <a:srgbClr val="6B7699"/>
                 </a:solidFill>
@@ -7553,7 +8284,7 @@
         <p:spPr>
           <a:xfrm>
             <a:off x="6597396" y="3104388"/>
-            <a:ext cx="4640580" cy="274320"/>
+            <a:ext cx="4800706" cy="271806"/>
           </a:xfrm>
           <a:prstGeom prst="rect">
             <a:avLst/>
@@ -7575,14 +8306,137 @@
               </a:spcAft>
             </a:pPr>
             <a:r>
-              <a:rPr sz="1600" b="0" i="0">
-                <a:solidFill>
-                  <a:srgbClr val="1B2140"/>
-                </a:solidFill>
-                <a:latin typeface="Segoe UI"/>
-              </a:rPr>
-              <a:t>рост частных вложений бизнеса в науку</a:t>
-            </a:r>
+              <a:rPr sz="1600" b="0" i="0" dirty="0" err="1">
+                <a:solidFill>
+                  <a:srgbClr val="1B2140"/>
+                </a:solidFill>
+                <a:latin typeface="Segoe UI"/>
+              </a:rPr>
+              <a:t>рост</a:t>
+            </a:r>
+            <a:r>
+              <a:rPr sz="1600" b="0" i="0" dirty="0">
+                <a:solidFill>
+                  <a:srgbClr val="1B2140"/>
+                </a:solidFill>
+                <a:latin typeface="Segoe UI"/>
+              </a:rPr>
+              <a:t> </a:t>
+            </a:r>
+            <a:r>
+              <a:rPr sz="1600" b="0" i="0" dirty="0" err="1">
+                <a:solidFill>
+                  <a:srgbClr val="1B2140"/>
+                </a:solidFill>
+                <a:latin typeface="Segoe UI"/>
+              </a:rPr>
+              <a:t>частн</a:t>
+            </a:r>
+            <a:r>
+              <a:rPr lang="ru-RU" sz="1600" b="0" i="0" dirty="0">
+                <a:solidFill>
+                  <a:srgbClr val="1B2140"/>
+                </a:solidFill>
+                <a:latin typeface="Segoe UI"/>
+              </a:rPr>
+              <a:t>ы</a:t>
+            </a:r>
+            <a:r>
+              <a:rPr sz="1600" b="0" i="0" dirty="0" err="1">
+                <a:solidFill>
+                  <a:srgbClr val="1B2140"/>
+                </a:solidFill>
+                <a:latin typeface="Segoe UI"/>
+              </a:rPr>
+              <a:t>х</a:t>
+            </a:r>
+            <a:r>
+              <a:rPr sz="1600" b="0" i="0" dirty="0">
+                <a:solidFill>
+                  <a:srgbClr val="1B2140"/>
+                </a:solidFill>
+                <a:latin typeface="Segoe UI"/>
+              </a:rPr>
+              <a:t> </a:t>
+            </a:r>
+            <a:r>
+              <a:rPr sz="1600" b="0" i="0" dirty="0" err="1">
+                <a:solidFill>
+                  <a:srgbClr val="1B2140"/>
+                </a:solidFill>
+                <a:latin typeface="Segoe UI"/>
+              </a:rPr>
+              <a:t>вложений</a:t>
+            </a:r>
+            <a:r>
+              <a:rPr sz="1600" b="0" i="0" dirty="0">
+                <a:solidFill>
+                  <a:srgbClr val="1B2140"/>
+                </a:solidFill>
+                <a:latin typeface="Segoe UI"/>
+              </a:rPr>
+              <a:t> </a:t>
+            </a:r>
+            <a:r>
+              <a:rPr sz="1600" b="0" i="0" dirty="0" err="1">
+                <a:solidFill>
+                  <a:srgbClr val="1B2140"/>
+                </a:solidFill>
+                <a:latin typeface="Segoe UI"/>
+              </a:rPr>
+              <a:t>бизнеса</a:t>
+            </a:r>
+            <a:r>
+              <a:rPr sz="1600" b="0" i="0" dirty="0">
+                <a:solidFill>
+                  <a:srgbClr val="1B2140"/>
+                </a:solidFill>
+                <a:latin typeface="Segoe UI"/>
+              </a:rPr>
+              <a:t> </a:t>
+            </a:r>
+            <a:r>
+              <a:rPr sz="1600" b="0" i="0" dirty="0" err="1">
+                <a:solidFill>
+                  <a:srgbClr val="1B2140"/>
+                </a:solidFill>
+                <a:latin typeface="Segoe UI"/>
+              </a:rPr>
+              <a:t>в</a:t>
+            </a:r>
+            <a:r>
+              <a:rPr sz="1600" b="0" i="0" dirty="0">
+                <a:solidFill>
+                  <a:srgbClr val="1B2140"/>
+                </a:solidFill>
+                <a:latin typeface="Segoe UI"/>
+              </a:rPr>
+              <a:t> </a:t>
+            </a:r>
+            <a:r>
+              <a:rPr sz="1600" b="0" i="0" dirty="0" err="1">
+                <a:solidFill>
+                  <a:srgbClr val="1B2140"/>
+                </a:solidFill>
+                <a:latin typeface="Segoe UI"/>
+              </a:rPr>
+              <a:t>науку</a:t>
+            </a:r>
+            <a:r>
+              <a:rPr lang="ru-RU" sz="1600" b="0" i="0" dirty="0">
+                <a:solidFill>
+                  <a:srgbClr val="1B2140"/>
+                </a:solidFill>
+                <a:latin typeface="Segoe UI"/>
+              </a:rPr>
+              <a:t> за 2025 г.</a:t>
+            </a:r>
+            <a:endParaRPr sz="1600" b="0" i="0" dirty="0">
+              <a:solidFill>
+                <a:srgbClr val="1B2140"/>
+              </a:solidFill>
+              <a:latin typeface="Segoe UI"/>
+            </a:endParaRPr>
           </a:p>
         </p:txBody>
       </p:sp>
@@ -7617,16 +8471,25 @@
               </a:spcAft>
             </a:pPr>
             <a:r>
-              <a:rPr sz="900" b="0" i="1">
+              <a:rPr sz="900" b="0" i="1" dirty="0" err="1">
                 <a:solidFill>
                   <a:srgbClr val="6B7699"/>
                 </a:solidFill>
                 <a:latin typeface="Segoe UI"/>
               </a:rPr>
-              <a:t>Источник: </a:t>
-            </a:r>
-            <a:r>
-              <a:rPr sz="900" b="0" i="1" u="sng">
+              <a:t>Источник</a:t>
+            </a:r>
+            <a:r>
+              <a:rPr sz="900" b="0" i="1" dirty="0">
+                <a:solidFill>
+                  <a:srgbClr val="6B7699"/>
+                </a:solidFill>
+                <a:latin typeface="Segoe UI"/>
+              </a:rPr>
+              <a:t>: </a:t>
+            </a:r>
+            <a:r>
+              <a:rPr sz="900" b="0" i="1" u="sng" dirty="0">
                 <a:solidFill>
                   <a:srgbClr val="6B7699"/>
                 </a:solidFill>
@@ -8091,14 +8954,29 @@
               </a:spcAft>
             </a:pPr>
             <a:r>
-              <a:rPr sz="5400" b="0" i="0">
+              <a:rPr sz="5400" b="0" i="0" dirty="0">
                 <a:solidFill>
                   <a:srgbClr val="1E2761"/>
                 </a:solidFill>
                 <a:latin typeface="Segoe UI Semibold"/>
               </a:rPr>
-              <a:t>2,6 млн</a:t>
-            </a:r>
+              <a:t>2,6 </a:t>
+            </a:r>
+            <a:r>
+              <a:rPr sz="5400" b="0" i="0" dirty="0" err="1">
+                <a:solidFill>
+                  <a:srgbClr val="1E2761"/>
+                </a:solidFill>
+                <a:latin typeface="Segoe UI Semibold"/>
+              </a:rPr>
+              <a:t>млн</a:t>
+            </a:r>
+            <a:endParaRPr sz="5400" b="0" i="0" dirty="0">
+              <a:solidFill>
+                <a:srgbClr val="1E2761"/>
+              </a:solidFill>
+              <a:latin typeface="Segoe UI Semibold"/>
+            </a:endParaRPr>
           </a:p>
         </p:txBody>
       </p:sp>
@@ -9141,7 +10019,7 @@
         <p:spPr>
           <a:xfrm>
             <a:off x="6551675" y="2286000"/>
-            <a:ext cx="1885949" cy="960120"/>
+            <a:ext cx="1885949" cy="738664"/>
           </a:xfrm>
           <a:prstGeom prst="rect">
             <a:avLst/>
@@ -9163,7 +10041,7 @@
               </a:spcAft>
             </a:pPr>
             <a:r>
-              <a:rPr sz="4800" b="0" i="0">
+              <a:rPr sz="4800" b="0" i="0" dirty="0">
                 <a:solidFill>
                   <a:srgbClr val="1E2761"/>
                 </a:solidFill>
@@ -9205,13 +10083,112 @@
               </a:spcAft>
             </a:pPr>
             <a:r>
-              <a:rPr sz="1450" b="0" i="0">
-                <a:solidFill>
-                  <a:srgbClr val="1B2140"/>
-                </a:solidFill>
-                <a:latin typeface="Segoe UI"/>
-              </a:rPr>
-              <a:t>компаний в стране берут льготу на НИОКР</a:t>
+              <a:rPr sz="1450" b="0" i="0" dirty="0" err="1">
+                <a:solidFill>
+                  <a:srgbClr val="1B2140"/>
+                </a:solidFill>
+                <a:latin typeface="Segoe UI"/>
+              </a:rPr>
+              <a:t>компаний</a:t>
+            </a:r>
+            <a:r>
+              <a:rPr sz="1450" b="0" i="0" dirty="0">
+                <a:solidFill>
+                  <a:srgbClr val="1B2140"/>
+                </a:solidFill>
+                <a:latin typeface="Segoe UI"/>
+              </a:rPr>
+              <a:t> </a:t>
+            </a:r>
+            <a:r>
+              <a:rPr sz="1450" b="0" i="0" dirty="0" err="1">
+                <a:solidFill>
+                  <a:srgbClr val="1B2140"/>
+                </a:solidFill>
+                <a:latin typeface="Segoe UI"/>
+              </a:rPr>
+              <a:t>в</a:t>
+            </a:r>
+            <a:r>
+              <a:rPr sz="1450" b="0" i="0" dirty="0">
+                <a:solidFill>
+                  <a:srgbClr val="1B2140"/>
+                </a:solidFill>
+                <a:latin typeface="Segoe UI"/>
+              </a:rPr>
+              <a:t> </a:t>
+            </a:r>
+            <a:r>
+              <a:rPr sz="1450" b="0" i="0" dirty="0" err="1">
+                <a:solidFill>
+                  <a:srgbClr val="1B2140"/>
+                </a:solidFill>
+                <a:latin typeface="Segoe UI"/>
+              </a:rPr>
+              <a:t>стране</a:t>
+            </a:r>
+            <a:r>
+              <a:rPr sz="1450" b="0" i="0" dirty="0">
+                <a:solidFill>
+                  <a:srgbClr val="1B2140"/>
+                </a:solidFill>
+                <a:latin typeface="Segoe UI"/>
+              </a:rPr>
+              <a:t> </a:t>
+            </a:r>
+            <a:r>
+              <a:rPr sz="1450" b="0" i="0" dirty="0" err="1">
+                <a:solidFill>
+                  <a:srgbClr val="1B2140"/>
+                </a:solidFill>
+                <a:latin typeface="Segoe UI"/>
+              </a:rPr>
+              <a:t>берут</a:t>
+            </a:r>
+            <a:r>
+              <a:rPr sz="1450" b="0" i="0" dirty="0">
+                <a:solidFill>
+                  <a:srgbClr val="1B2140"/>
+                </a:solidFill>
+                <a:latin typeface="Segoe UI"/>
+              </a:rPr>
+              <a:t> </a:t>
+            </a:r>
+            <a:r>
+              <a:rPr sz="1450" b="0" i="0" dirty="0" err="1">
+                <a:solidFill>
+                  <a:srgbClr val="1B2140"/>
+                </a:solidFill>
+                <a:latin typeface="Segoe UI"/>
+              </a:rPr>
+              <a:t>льготу</a:t>
+            </a:r>
+            <a:r>
+              <a:rPr sz="1450" b="0" i="0" dirty="0">
+                <a:solidFill>
+                  <a:srgbClr val="1B2140"/>
+                </a:solidFill>
+                <a:latin typeface="Segoe UI"/>
+              </a:rPr>
+              <a:t> </a:t>
+            </a:r>
+            <a:r>
+              <a:rPr sz="1450" b="0" i="0" dirty="0" err="1">
+                <a:solidFill>
+                  <a:srgbClr val="1B2140"/>
+                </a:solidFill>
+                <a:latin typeface="Segoe UI"/>
+              </a:rPr>
+              <a:t>на</a:t>
+            </a:r>
+            <a:r>
+              <a:rPr sz="1450" b="0" i="0" dirty="0">
+                <a:solidFill>
+                  <a:srgbClr val="1B2140"/>
+                </a:solidFill>
+                <a:latin typeface="Segoe UI"/>
+              </a:rPr>
+              <a:t> НИОКР</a:t>
             </a:r>
           </a:p>
         </p:txBody>
@@ -9247,253 +10224,32 @@
               </a:spcAft>
             </a:pPr>
             <a:r>
-              <a:rPr sz="900" b="0" i="1">
+              <a:rPr sz="900" b="0" i="1" dirty="0" err="1">
                 <a:solidFill>
                   <a:srgbClr val="6B7699"/>
                 </a:solidFill>
                 <a:latin typeface="Segoe UI"/>
               </a:rPr>
-              <a:t>Источник: </a:t>
-            </a:r>
-            <a:r>
-              <a:rPr sz="900" b="0" i="1" u="sng">
+              <a:t>Источник</a:t>
+            </a:r>
+            <a:r>
+              <a:rPr sz="900" b="0" i="1" dirty="0">
                 <a:solidFill>
                   <a:srgbClr val="6B7699"/>
                 </a:solidFill>
                 <a:latin typeface="Segoe UI"/>
+              </a:rPr>
+              <a:t>: </a:t>
+            </a:r>
+            <a:r>
+              <a:rPr sz="900" b="0" i="1" u="sng" dirty="0">
+                <a:solidFill>
+                  <a:srgbClr val="6B7699"/>
+                </a:solidFill>
+                <a:latin typeface="Segoe UI"/>
                 <a:hlinkClick r:id="rId4"/>
               </a:rPr>
               <a:t>Решетников, ПМЭФ</a:t>
-            </a:r>
-          </a:p>
-        </p:txBody>
-      </p:sp>
-      <p:sp>
-        <p:nvSpPr>
-          <p:cNvPr id="22" name="Rounded Rectangle 21"/>
-          <p:cNvSpPr/>
-          <p:nvPr/>
-        </p:nvSpPr>
-        <p:spPr>
-          <a:xfrm>
-            <a:off x="9041129" y="1737360"/>
-            <a:ext cx="2507741" cy="2487168"/>
-          </a:xfrm>
-          <a:prstGeom prst="roundRect">
-            <a:avLst>
-              <a:gd name="adj" fmla="val 5147"/>
-            </a:avLst>
-          </a:prstGeom>
-          <a:solidFill>
-            <a:srgbClr val="FFFFFF"/>
-          </a:solidFill>
-          <a:ln w="22225">
-            <a:solidFill>
-              <a:srgbClr val="C9A24B"/>
-            </a:solidFill>
-          </a:ln>
-          <a:effectLst/>
-        </p:spPr>
-        <p:style>
-          <a:lnRef idx="1">
-            <a:schemeClr val="accent1"/>
-          </a:lnRef>
-          <a:fillRef idx="3">
-            <a:schemeClr val="accent1"/>
-          </a:fillRef>
-          <a:effectRef idx="2">
-            <a:schemeClr val="accent1"/>
-          </a:effectRef>
-          <a:fontRef idx="minor">
-            <a:schemeClr val="lt1"/>
-          </a:fontRef>
-        </p:style>
-        <p:txBody>
-          <a:bodyPr rtlCol="0" anchor="ctr"/>
-          <a:lstStyle/>
-          <a:p>
-            <a:pPr algn="ctr"/>
-            <a:endParaRPr/>
-          </a:p>
-        </p:txBody>
-      </p:sp>
-      <p:sp>
-        <p:nvSpPr>
-          <p:cNvPr id="23" name="Rectangle 22"/>
-          <p:cNvSpPr/>
-          <p:nvPr/>
-        </p:nvSpPr>
-        <p:spPr>
-          <a:xfrm>
-            <a:off x="9352025" y="2048255"/>
-            <a:ext cx="457200" cy="41148"/>
-          </a:xfrm>
-          <a:prstGeom prst="rect">
-            <a:avLst/>
-          </a:prstGeom>
-          <a:solidFill>
-            <a:srgbClr val="C9A24B"/>
-          </a:solidFill>
-          <a:ln>
-            <a:noFill/>
-          </a:ln>
-          <a:effectLst/>
-        </p:spPr>
-        <p:style>
-          <a:lnRef idx="1">
-            <a:schemeClr val="accent1"/>
-          </a:lnRef>
-          <a:fillRef idx="3">
-            <a:schemeClr val="accent1"/>
-          </a:fillRef>
-          <a:effectRef idx="2">
-            <a:schemeClr val="accent1"/>
-          </a:effectRef>
-          <a:fontRef idx="minor">
-            <a:schemeClr val="lt1"/>
-          </a:fontRef>
-        </p:style>
-        <p:txBody>
-          <a:bodyPr rtlCol="0" anchor="ctr"/>
-          <a:lstStyle/>
-          <a:p>
-            <a:pPr algn="ctr"/>
-            <a:endParaRPr/>
-          </a:p>
-        </p:txBody>
-      </p:sp>
-      <p:sp>
-        <p:nvSpPr>
-          <p:cNvPr id="24" name="TextBox 23"/>
-          <p:cNvSpPr txBox="1"/>
-          <p:nvPr/>
-        </p:nvSpPr>
-        <p:spPr>
-          <a:xfrm>
-            <a:off x="9352025" y="2286000"/>
-            <a:ext cx="1885949" cy="960120"/>
-          </a:xfrm>
-          <a:prstGeom prst="rect">
-            <a:avLst/>
-          </a:prstGeom>
-          <a:noFill/>
-        </p:spPr>
-        <p:txBody>
-          <a:bodyPr wrap="square" lIns="0" tIns="0" rIns="0" bIns="0" anchor="t">
-            <a:spAutoFit/>
-          </a:bodyPr>
-          <a:lstStyle/>
-          <a:p>
-            <a:pPr algn="l">
-              <a:lnSpc>
-                <a:spcPct val="100000"/>
-              </a:lnSpc>
-              <a:spcAft>
-                <a:spcPts val="0"/>
-              </a:spcAft>
-            </a:pPr>
-            <a:r>
-              <a:rPr sz="4800" b="0" i="0">
-                <a:solidFill>
-                  <a:srgbClr val="C9A24B"/>
-                </a:solidFill>
-                <a:latin typeface="Segoe UI Semibold"/>
-              </a:rPr>
-              <a:t>200</a:t>
-            </a:r>
-          </a:p>
-        </p:txBody>
-      </p:sp>
-      <p:sp>
-        <p:nvSpPr>
-          <p:cNvPr id="25" name="TextBox 24"/>
-          <p:cNvSpPr txBox="1"/>
-          <p:nvPr/>
-        </p:nvSpPr>
-        <p:spPr>
-          <a:xfrm>
-            <a:off x="9352025" y="3078480"/>
-            <a:ext cx="1885949" cy="688848"/>
-          </a:xfrm>
-          <a:prstGeom prst="rect">
-            <a:avLst/>
-          </a:prstGeom>
-          <a:noFill/>
-        </p:spPr>
-        <p:txBody>
-          <a:bodyPr wrap="square" lIns="0" tIns="0" rIns="0" bIns="0" anchor="t">
-            <a:spAutoFit/>
-          </a:bodyPr>
-          <a:lstStyle/>
-          <a:p>
-            <a:pPr algn="l">
-              <a:lnSpc>
-                <a:spcPct val="122000"/>
-              </a:lnSpc>
-              <a:spcAft>
-                <a:spcPts val="0"/>
-              </a:spcAft>
-            </a:pPr>
-            <a:r>
-              <a:rPr sz="1450" b="0" i="0">
-                <a:solidFill>
-                  <a:srgbClr val="1B2140"/>
-                </a:solidFill>
-                <a:latin typeface="Segoe UI"/>
-              </a:rPr>
-              <a:t>техноброкеров обучил Роспатент. Работать негде</a:t>
-            </a:r>
-          </a:p>
-        </p:txBody>
-      </p:sp>
-      <p:sp>
-        <p:nvSpPr>
-          <p:cNvPr id="26" name="TextBox 25"/>
-          <p:cNvSpPr txBox="1"/>
-          <p:nvPr/>
-        </p:nvSpPr>
-        <p:spPr>
-          <a:xfrm>
-            <a:off x="9352025" y="3840480"/>
-            <a:ext cx="1885949" cy="274320"/>
-          </a:xfrm>
-          <a:prstGeom prst="rect">
-            <a:avLst/>
-          </a:prstGeom>
-          <a:noFill/>
-        </p:spPr>
-        <p:txBody>
-          <a:bodyPr wrap="square" lIns="0" tIns="0" rIns="0" bIns="0" anchor="t">
-            <a:spAutoFit/>
-          </a:bodyPr>
-          <a:lstStyle/>
-          <a:p>
-            <a:pPr algn="l">
-              <a:lnSpc>
-                <a:spcPct val="116000"/>
-              </a:lnSpc>
-              <a:spcAft>
-                <a:spcPts val="0"/>
-              </a:spcAft>
-            </a:pPr>
-            <a:r>
-              <a:rPr sz="900" b="0" i="1">
-                <a:solidFill>
-                  <a:srgbClr val="6B7699"/>
-                </a:solidFill>
-                <a:latin typeface="Segoe UI"/>
-              </a:rPr>
-              <a:t>Источник: </a:t>
-            </a:r>
-            <a:r>
-              <a:rPr sz="900" b="0" i="1" u="sng">
-                <a:solidFill>
-                  <a:srgbClr val="6B7699"/>
-                </a:solidFill>
-                <a:latin typeface="Segoe UI"/>
-                <a:hlinkClick r:id="rId5"/>
-              </a:rPr>
-              <a:t>Роспатент</a:t>
             </a:r>
           </a:p>
         </p:txBody>
@@ -10701,7 +11457,7 @@
               </a:spcAft>
             </a:pPr>
             <a:r>
-              <a:rPr sz="5200" b="0" i="0">
+              <a:rPr sz="5200" b="0" i="0" dirty="0">
                 <a:solidFill>
                   <a:srgbClr val="1E2761"/>
                 </a:solidFill>
@@ -11445,51 +12201,6 @@
       </p:sp>
       <p:sp>
         <p:nvSpPr>
-          <p:cNvPr id="4" name="Rectangle 3"/>
-          <p:cNvSpPr/>
-          <p:nvPr/>
-        </p:nvSpPr>
-        <p:spPr>
-          <a:xfrm>
-            <a:off x="640080" y="1298448"/>
-            <a:ext cx="1371600" cy="50292"/>
-          </a:xfrm>
-          <a:prstGeom prst="rect">
-            <a:avLst/>
-          </a:prstGeom>
-          <a:solidFill>
-            <a:srgbClr val="C9A24B"/>
-          </a:solidFill>
-          <a:ln>
-            <a:noFill/>
-          </a:ln>
-          <a:effectLst/>
-        </p:spPr>
-        <p:style>
-          <a:lnRef idx="1">
-            <a:schemeClr val="accent1"/>
-          </a:lnRef>
-          <a:fillRef idx="3">
-            <a:schemeClr val="accent1"/>
-          </a:fillRef>
-          <a:effectRef idx="2">
-            <a:schemeClr val="accent1"/>
-          </a:effectRef>
-          <a:fontRef idx="minor">
-            <a:schemeClr val="lt1"/>
-          </a:fontRef>
-        </p:style>
-        <p:txBody>
-          <a:bodyPr rtlCol="0" anchor="ctr"/>
-          <a:lstStyle/>
-          <a:p>
-            <a:pPr algn="ctr"/>
-            <a:endParaRPr/>
-          </a:p>
-        </p:txBody>
-      </p:sp>
-      <p:sp>
-        <p:nvSpPr>
           <p:cNvPr id="5" name="Rectangle 4"/>
           <p:cNvSpPr/>
           <p:nvPr/>
@@ -11564,14 +12275,29 @@
               </a:spcAft>
             </a:pPr>
             <a:r>
-              <a:rPr sz="1400" b="0" i="0">
+              <a:rPr sz="1400" b="0" i="0" dirty="0">
                 <a:solidFill>
                   <a:srgbClr val="1E2761"/>
                 </a:solidFill>
                 <a:latin typeface="Segoe UI Semibold"/>
               </a:rPr>
-              <a:t>1. Задача</a:t>
-            </a:r>
+              <a:t>1. </a:t>
+            </a:r>
+            <a:r>
+              <a:rPr sz="1400" b="0" i="0" dirty="0" err="1">
+                <a:solidFill>
+                  <a:srgbClr val="1E2761"/>
+                </a:solidFill>
+                <a:latin typeface="Segoe UI Semibold"/>
+              </a:rPr>
+              <a:t>Задача</a:t>
+            </a:r>
+            <a:endParaRPr sz="1400" b="0" i="0" dirty="0">
+              <a:solidFill>
+                <a:srgbClr val="1E2761"/>
+              </a:solidFill>
+              <a:latin typeface="Segoe UI Semibold"/>
+            </a:endParaRPr>
           </a:p>
         </p:txBody>
       </p:sp>
@@ -12530,7 +13256,25 @@
                 <a:latin typeface="Segoe UI Semibold"/>
               </a:rPr>
               <a:t>
-в </a:t>
+</a:t>
+            </a:r>
+            <a:r>
+              <a:rPr sz="1400" b="0" i="0" dirty="0" err="1">
+                <a:solidFill>
+                  <a:srgbClr val="1E2761"/>
+                </a:solidFill>
+                <a:latin typeface="Segoe UI Semibold"/>
+              </a:rPr>
+              <a:t>в</a:t>
+            </a:r>
+            <a:r>
+              <a:rPr sz="1400" b="0" i="0" dirty="0">
+                <a:solidFill>
+                  <a:srgbClr val="1E2761"/>
+                </a:solidFill>
+                <a:latin typeface="Segoe UI Semibold"/>
+              </a:rPr>
+              <a:t> </a:t>
             </a:r>
             <a:r>
               <a:rPr sz="1400" b="0" i="0" dirty="0" err="1">
@@ -12769,7 +13513,16 @@
                 </a:solidFill>
                 <a:latin typeface="Segoe UI Semibold"/>
               </a:rPr>
-              <a:t>С</a:t>
+              <a:t>Структурируем и ведем</a:t>
+            </a:r>
+            <a:r>
+              <a:rPr sz="1400" b="0" i="0" dirty="0">
+                <a:solidFill>
+                  <a:srgbClr val="1E2761"/>
+                </a:solidFill>
+                <a:latin typeface="Segoe UI Semibold"/>
+              </a:rPr>
+              <a:t> </a:t>
             </a:r>
             <a:r>
               <a:rPr sz="1400" b="0" i="0" dirty="0" err="1">
@@ -12778,53 +13531,7 @@
                 </a:solidFill>
                 <a:latin typeface="Segoe UI Semibold"/>
               </a:rPr>
-              <a:t>обирае</a:t>
-            </a:r>
-            <a:r>
-              <a:rPr lang="ru-RU" sz="1400" b="0" i="0" dirty="0">
-                <a:solidFill>
-                  <a:srgbClr val="1E2761"/>
-                </a:solidFill>
-                <a:latin typeface="Segoe UI Semibold"/>
-              </a:rPr>
-              <a:t>м</a:t>
-            </a:r>
-            <a:r>
-              <a:rPr sz="1400" b="0" i="0" dirty="0">
-                <a:solidFill>
-                  <a:srgbClr val="1E2761"/>
-                </a:solidFill>
-                <a:latin typeface="Segoe UI Semibold"/>
-              </a:rPr>
-              <a:t> </a:t>
-            </a:r>
-            <a:r>
-              <a:rPr sz="1400" b="0" i="0" dirty="0" err="1">
-                <a:solidFill>
-                  <a:srgbClr val="1E2761"/>
-                </a:solidFill>
-                <a:latin typeface="Segoe UI Semibold"/>
-              </a:rPr>
               <a:t>сделку</a:t>
-            </a:r>
-            <a:r>
-              <a:rPr sz="1400" b="0" i="0" dirty="0">
-                <a:solidFill>
-                  <a:srgbClr val="1E2761"/>
-                </a:solidFill>
-                <a:latin typeface="Segoe UI Semibold"/>
-              </a:rPr>
-              <a:t>
-и </a:t>
-            </a:r>
-            <a:r>
-              <a:rPr sz="1400" b="0" i="0" dirty="0" err="1">
-                <a:solidFill>
-                  <a:srgbClr val="1E2761"/>
-                </a:solidFill>
-                <a:latin typeface="Segoe UI Semibold"/>
-              </a:rPr>
-              <a:t>поддержку</a:t>
             </a:r>
             <a:endParaRPr sz="1400" b="0" i="0" dirty="0">
               <a:solidFill>
@@ -13356,522 +14063,6 @@
               </a:solidFill>
               <a:latin typeface="Segoe UI"/>
             </a:endParaRPr>
-          </a:p>
-        </p:txBody>
-      </p:sp>
-      <p:sp>
-        <p:nvSpPr>
-          <p:cNvPr id="38" name="TextBox 37"/>
-          <p:cNvSpPr txBox="1"/>
-          <p:nvPr/>
-        </p:nvSpPr>
-        <p:spPr>
-          <a:xfrm>
-            <a:off x="640080" y="5468112"/>
-            <a:ext cx="10908792" cy="256032"/>
-          </a:xfrm>
-          <a:prstGeom prst="rect">
-            <a:avLst/>
-          </a:prstGeom>
-          <a:noFill/>
-        </p:spPr>
-        <p:txBody>
-          <a:bodyPr wrap="square" lIns="0" tIns="0" rIns="0" bIns="0" anchor="t">
-            <a:spAutoFit/>
-          </a:bodyPr>
-          <a:lstStyle/>
-          <a:p>
-            <a:pPr algn="l">
-              <a:lnSpc>
-                <a:spcPct val="116000"/>
-              </a:lnSpc>
-              <a:spcAft>
-                <a:spcPts val="0"/>
-              </a:spcAft>
-            </a:pPr>
-            <a:r>
-              <a:rPr sz="1050" b="0" i="0" spc="250" dirty="0">
-                <a:solidFill>
-                  <a:srgbClr val="C9A24B"/>
-                </a:solidFill>
-                <a:latin typeface="Segoe UI Semibold"/>
-              </a:rPr>
-              <a:t>ГОСУДАРСТВЕННЫЕ ИНСТРУМЕНТЫ, КОТОРЫЕ МЫ ПОДКЛЮЧАЕМ</a:t>
-            </a:r>
-          </a:p>
-        </p:txBody>
-      </p:sp>
-      <p:sp>
-        <p:nvSpPr>
-          <p:cNvPr id="39" name="TextBox 38"/>
-          <p:cNvSpPr txBox="1"/>
-          <p:nvPr/>
-        </p:nvSpPr>
-        <p:spPr>
-          <a:xfrm>
-            <a:off x="640080" y="5833872"/>
-            <a:ext cx="2521458" cy="219456"/>
-          </a:xfrm>
-          <a:prstGeom prst="rect">
-            <a:avLst/>
-          </a:prstGeom>
-          <a:noFill/>
-        </p:spPr>
-        <p:txBody>
-          <a:bodyPr wrap="square" lIns="0" tIns="0" rIns="0" bIns="0" anchor="t">
-            <a:spAutoFit/>
-          </a:bodyPr>
-          <a:lstStyle/>
-          <a:p>
-            <a:pPr algn="l">
-              <a:lnSpc>
-                <a:spcPct val="116000"/>
-              </a:lnSpc>
-              <a:spcAft>
-                <a:spcPts val="0"/>
-              </a:spcAft>
-            </a:pPr>
-            <a:r>
-              <a:rPr sz="1300" b="0" i="0" dirty="0" err="1">
-                <a:solidFill>
-                  <a:srgbClr val="1E2761"/>
-                </a:solidFill>
-                <a:latin typeface="Segoe UI Semibold"/>
-              </a:rPr>
-              <a:t>Постановление</a:t>
-            </a:r>
-            <a:r>
-              <a:rPr sz="1300" b="0" i="0" dirty="0">
-                <a:solidFill>
-                  <a:srgbClr val="1E2761"/>
-                </a:solidFill>
-                <a:latin typeface="Segoe UI Semibold"/>
-              </a:rPr>
-              <a:t> № 218</a:t>
-            </a:r>
-          </a:p>
-        </p:txBody>
-      </p:sp>
-      <p:sp>
-        <p:nvSpPr>
-          <p:cNvPr id="40" name="TextBox 39"/>
-          <p:cNvSpPr txBox="1"/>
-          <p:nvPr/>
-        </p:nvSpPr>
-        <p:spPr>
-          <a:xfrm>
-            <a:off x="640080" y="6071616"/>
-            <a:ext cx="2521458" cy="195503"/>
-          </a:xfrm>
-          <a:prstGeom prst="rect">
-            <a:avLst/>
-          </a:prstGeom>
-          <a:noFill/>
-        </p:spPr>
-        <p:txBody>
-          <a:bodyPr wrap="square" lIns="0" tIns="0" rIns="0" bIns="0" anchor="t">
-            <a:spAutoFit/>
-          </a:bodyPr>
-          <a:lstStyle/>
-          <a:p>
-            <a:pPr algn="l">
-              <a:lnSpc>
-                <a:spcPct val="116000"/>
-              </a:lnSpc>
-              <a:spcAft>
-                <a:spcPts val="0"/>
-              </a:spcAft>
-            </a:pPr>
-            <a:r>
-              <a:rPr lang="ru-RU" sz="1200" b="0" i="0" dirty="0">
-                <a:solidFill>
-                  <a:srgbClr val="6B7699"/>
-                </a:solidFill>
-                <a:latin typeface="Segoe UI"/>
-              </a:rPr>
-              <a:t>Компенсация </a:t>
-            </a:r>
-            <a:r>
-              <a:rPr sz="1200" b="0" i="0" dirty="0" err="1">
-                <a:solidFill>
-                  <a:srgbClr val="6B7699"/>
-                </a:solidFill>
-                <a:latin typeface="Segoe UI"/>
-              </a:rPr>
-              <a:t>до</a:t>
-            </a:r>
-            <a:r>
-              <a:rPr sz="1200" b="0" i="0" dirty="0">
-                <a:solidFill>
-                  <a:srgbClr val="6B7699"/>
-                </a:solidFill>
-                <a:latin typeface="Segoe UI"/>
-              </a:rPr>
-              <a:t> 70% </a:t>
-            </a:r>
-            <a:r>
-              <a:rPr sz="1200" b="0" i="0" dirty="0" err="1">
-                <a:solidFill>
-                  <a:srgbClr val="6B7699"/>
-                </a:solidFill>
-                <a:latin typeface="Segoe UI"/>
-              </a:rPr>
-              <a:t>стоимости</a:t>
-            </a:r>
-            <a:endParaRPr sz="1200" b="0" i="0" dirty="0">
-              <a:solidFill>
-                <a:srgbClr val="6B7699"/>
-              </a:solidFill>
-              <a:latin typeface="Segoe UI"/>
-            </a:endParaRPr>
-          </a:p>
-        </p:txBody>
-      </p:sp>
-      <p:sp>
-        <p:nvSpPr>
-          <p:cNvPr id="41" name="TextBox 40"/>
-          <p:cNvSpPr txBox="1"/>
-          <p:nvPr/>
-        </p:nvSpPr>
-        <p:spPr>
-          <a:xfrm>
-            <a:off x="3435857" y="5833872"/>
-            <a:ext cx="2521458" cy="219456"/>
-          </a:xfrm>
-          <a:prstGeom prst="rect">
-            <a:avLst/>
-          </a:prstGeom>
-          <a:noFill/>
-        </p:spPr>
-        <p:txBody>
-          <a:bodyPr wrap="square" lIns="0" tIns="0" rIns="0" bIns="0" anchor="t">
-            <a:spAutoFit/>
-          </a:bodyPr>
-          <a:lstStyle/>
-          <a:p>
-            <a:pPr algn="l">
-              <a:lnSpc>
-                <a:spcPct val="116000"/>
-              </a:lnSpc>
-              <a:spcAft>
-                <a:spcPts val="0"/>
-              </a:spcAft>
-            </a:pPr>
-            <a:r>
-              <a:rPr sz="1300" b="0" i="0">
-                <a:solidFill>
-                  <a:srgbClr val="1E2761"/>
-                </a:solidFill>
-                <a:latin typeface="Segoe UI Semibold"/>
-              </a:rPr>
-              <a:t>Коэффициент 2</a:t>
-            </a:r>
-          </a:p>
-        </p:txBody>
-      </p:sp>
-      <p:sp>
-        <p:nvSpPr>
-          <p:cNvPr id="42" name="TextBox 41"/>
-          <p:cNvSpPr txBox="1"/>
-          <p:nvPr/>
-        </p:nvSpPr>
-        <p:spPr>
-          <a:xfrm>
-            <a:off x="3435857" y="6071616"/>
-            <a:ext cx="2521458" cy="195503"/>
-          </a:xfrm>
-          <a:prstGeom prst="rect">
-            <a:avLst/>
-          </a:prstGeom>
-          <a:noFill/>
-        </p:spPr>
-        <p:txBody>
-          <a:bodyPr wrap="square" lIns="0" tIns="0" rIns="0" bIns="0" anchor="t">
-            <a:spAutoFit/>
-          </a:bodyPr>
-          <a:lstStyle/>
-          <a:p>
-            <a:pPr algn="l">
-              <a:lnSpc>
-                <a:spcPct val="116000"/>
-              </a:lnSpc>
-              <a:spcAft>
-                <a:spcPts val="0"/>
-              </a:spcAft>
-            </a:pPr>
-            <a:r>
-              <a:rPr sz="1200" b="0" i="0" dirty="0">
-                <a:solidFill>
-                  <a:srgbClr val="6B7699"/>
-                </a:solidFill>
-                <a:latin typeface="Segoe UI"/>
-              </a:rPr>
-              <a:t> </a:t>
-            </a:r>
-            <a:r>
-              <a:rPr sz="1200" b="0" i="0" dirty="0" err="1">
-                <a:solidFill>
-                  <a:srgbClr val="6B7699"/>
-                </a:solidFill>
-                <a:latin typeface="Segoe UI"/>
-              </a:rPr>
-              <a:t>налогу</a:t>
-            </a:r>
-            <a:r>
-              <a:rPr sz="1200" b="0" i="0" dirty="0">
-                <a:solidFill>
-                  <a:srgbClr val="6B7699"/>
-                </a:solidFill>
-                <a:latin typeface="Segoe UI"/>
-              </a:rPr>
-              <a:t> </a:t>
-            </a:r>
-            <a:r>
-              <a:rPr sz="1200" b="0" i="0" dirty="0" err="1">
-                <a:solidFill>
-                  <a:srgbClr val="6B7699"/>
-                </a:solidFill>
-                <a:latin typeface="Segoe UI"/>
-              </a:rPr>
-              <a:t>на</a:t>
-            </a:r>
-            <a:r>
-              <a:rPr sz="1200" b="0" i="0" dirty="0">
-                <a:solidFill>
-                  <a:srgbClr val="6B7699"/>
-                </a:solidFill>
-                <a:latin typeface="Segoe UI"/>
-              </a:rPr>
-              <a:t> </a:t>
-            </a:r>
-            <a:r>
-              <a:rPr sz="1200" b="0" i="0" dirty="0" err="1">
-                <a:solidFill>
-                  <a:srgbClr val="6B7699"/>
-                </a:solidFill>
-                <a:latin typeface="Segoe UI"/>
-              </a:rPr>
-              <a:t>прибыль</a:t>
-            </a:r>
-            <a:endParaRPr sz="1200" b="0" i="0" dirty="0">
-              <a:solidFill>
-                <a:srgbClr val="6B7699"/>
-              </a:solidFill>
-              <a:latin typeface="Segoe UI"/>
-            </a:endParaRPr>
-          </a:p>
-        </p:txBody>
-      </p:sp>
-      <p:sp>
-        <p:nvSpPr>
-          <p:cNvPr id="43" name="TextBox 42"/>
-          <p:cNvSpPr txBox="1"/>
-          <p:nvPr/>
-        </p:nvSpPr>
-        <p:spPr>
-          <a:xfrm>
-            <a:off x="6231636" y="5833872"/>
-            <a:ext cx="2521458" cy="219456"/>
-          </a:xfrm>
-          <a:prstGeom prst="rect">
-            <a:avLst/>
-          </a:prstGeom>
-          <a:noFill/>
-        </p:spPr>
-        <p:txBody>
-          <a:bodyPr wrap="square" lIns="0" tIns="0" rIns="0" bIns="0" anchor="t">
-            <a:spAutoFit/>
-          </a:bodyPr>
-          <a:lstStyle/>
-          <a:p>
-            <a:pPr algn="l">
-              <a:lnSpc>
-                <a:spcPct val="116000"/>
-              </a:lnSpc>
-              <a:spcAft>
-                <a:spcPts val="0"/>
-              </a:spcAft>
-            </a:pPr>
-            <a:r>
-              <a:rPr sz="1300" b="0" i="0">
-                <a:solidFill>
-                  <a:srgbClr val="1E2761"/>
-                </a:solidFill>
-                <a:latin typeface="Segoe UI Semibold"/>
-              </a:rPr>
-              <a:t>Грант на доращивание</a:t>
-            </a:r>
-          </a:p>
-        </p:txBody>
-      </p:sp>
-      <p:sp>
-        <p:nvSpPr>
-          <p:cNvPr id="44" name="TextBox 43"/>
-          <p:cNvSpPr txBox="1"/>
-          <p:nvPr/>
-        </p:nvSpPr>
-        <p:spPr>
-          <a:xfrm>
-            <a:off x="6231636" y="6071616"/>
-            <a:ext cx="2521458" cy="219456"/>
-          </a:xfrm>
-          <a:prstGeom prst="rect">
-            <a:avLst/>
-          </a:prstGeom>
-          <a:noFill/>
-        </p:spPr>
-        <p:txBody>
-          <a:bodyPr wrap="square" lIns="0" tIns="0" rIns="0" bIns="0" anchor="t">
-            <a:spAutoFit/>
-          </a:bodyPr>
-          <a:lstStyle/>
-          <a:p>
-            <a:pPr algn="l">
-              <a:lnSpc>
-                <a:spcPct val="116000"/>
-              </a:lnSpc>
-              <a:spcAft>
-                <a:spcPts val="0"/>
-              </a:spcAft>
-            </a:pPr>
-            <a:r>
-              <a:rPr sz="1200" b="0" i="0" dirty="0" err="1">
-                <a:solidFill>
-                  <a:srgbClr val="6B7699"/>
-                </a:solidFill>
-                <a:latin typeface="Segoe UI"/>
-              </a:rPr>
-              <a:t>до</a:t>
-            </a:r>
-            <a:r>
-              <a:rPr sz="1200" b="0" i="0" dirty="0">
-                <a:solidFill>
-                  <a:srgbClr val="6B7699"/>
-                </a:solidFill>
-                <a:latin typeface="Segoe UI"/>
-              </a:rPr>
-              <a:t> 250 </a:t>
-            </a:r>
-            <a:r>
-              <a:rPr sz="1200" b="0" i="0" dirty="0" err="1">
-                <a:solidFill>
-                  <a:srgbClr val="6B7699"/>
-                </a:solidFill>
-                <a:latin typeface="Segoe UI"/>
-              </a:rPr>
-              <a:t>млн</a:t>
-            </a:r>
-            <a:r>
-              <a:rPr sz="1200" b="0" i="0" dirty="0">
-                <a:solidFill>
-                  <a:srgbClr val="6B7699"/>
-                </a:solidFill>
-                <a:latin typeface="Segoe UI"/>
-              </a:rPr>
-              <a:t> ₽</a:t>
-            </a:r>
-          </a:p>
-        </p:txBody>
-      </p:sp>
-      <p:sp>
-        <p:nvSpPr>
-          <p:cNvPr id="45" name="TextBox 44"/>
-          <p:cNvSpPr txBox="1"/>
-          <p:nvPr/>
-        </p:nvSpPr>
-        <p:spPr>
-          <a:xfrm>
-            <a:off x="9027413" y="5833872"/>
-            <a:ext cx="2521458" cy="219456"/>
-          </a:xfrm>
-          <a:prstGeom prst="rect">
-            <a:avLst/>
-          </a:prstGeom>
-          <a:noFill/>
-        </p:spPr>
-        <p:txBody>
-          <a:bodyPr wrap="square" lIns="0" tIns="0" rIns="0" bIns="0" anchor="t">
-            <a:spAutoFit/>
-          </a:bodyPr>
-          <a:lstStyle/>
-          <a:p>
-            <a:pPr algn="l">
-              <a:lnSpc>
-                <a:spcPct val="116000"/>
-              </a:lnSpc>
-              <a:spcAft>
-                <a:spcPts val="0"/>
-              </a:spcAft>
-            </a:pPr>
-            <a:r>
-              <a:rPr sz="1300" b="0" i="0">
-                <a:solidFill>
-                  <a:srgbClr val="1E2761"/>
-                </a:solidFill>
-                <a:latin typeface="Segoe UI Semibold"/>
-              </a:rPr>
-              <a:t>Займы фонда региона</a:t>
-            </a:r>
-          </a:p>
-        </p:txBody>
-      </p:sp>
-      <p:sp>
-        <p:nvSpPr>
-          <p:cNvPr id="46" name="TextBox 45"/>
-          <p:cNvSpPr txBox="1"/>
-          <p:nvPr/>
-        </p:nvSpPr>
-        <p:spPr>
-          <a:xfrm>
-            <a:off x="9027413" y="6071616"/>
-            <a:ext cx="2521458" cy="219456"/>
-          </a:xfrm>
-          <a:prstGeom prst="rect">
-            <a:avLst/>
-          </a:prstGeom>
-          <a:noFill/>
-        </p:spPr>
-        <p:txBody>
-          <a:bodyPr wrap="square" lIns="0" tIns="0" rIns="0" bIns="0" anchor="t">
-            <a:spAutoFit/>
-          </a:bodyPr>
-          <a:lstStyle/>
-          <a:p>
-            <a:pPr algn="l">
-              <a:lnSpc>
-                <a:spcPct val="116000"/>
-              </a:lnSpc>
-              <a:spcAft>
-                <a:spcPts val="0"/>
-              </a:spcAft>
-            </a:pPr>
-            <a:r>
-              <a:rPr sz="1200" b="0" i="0" dirty="0">
-                <a:solidFill>
-                  <a:srgbClr val="6B7699"/>
-                </a:solidFill>
-                <a:latin typeface="Segoe UI"/>
-              </a:rPr>
-              <a:t>20–200 </a:t>
-            </a:r>
-            <a:r>
-              <a:rPr sz="1200" b="0" i="0" dirty="0" err="1">
-                <a:solidFill>
-                  <a:srgbClr val="6B7699"/>
-                </a:solidFill>
-                <a:latin typeface="Segoe UI"/>
-              </a:rPr>
-              <a:t>млн</a:t>
-            </a:r>
-            <a:r>
-              <a:rPr sz="1200" b="0" i="0" dirty="0">
-                <a:solidFill>
-                  <a:srgbClr val="6B7699"/>
-                </a:solidFill>
-                <a:latin typeface="Segoe UI"/>
-              </a:rPr>
-              <a:t> ₽</a:t>
-            </a:r>
           </a:p>
         </p:txBody>
       </p:sp>
@@ -14065,14 +14256,65 @@
               </a:spcAft>
             </a:pPr>
             <a:r>
-              <a:rPr sz="3000" b="0" i="0">
+              <a:rPr sz="3000" b="0" i="0" dirty="0">
                 <a:solidFill>
                   <a:srgbClr val="1E2761"/>
                 </a:solidFill>
                 <a:latin typeface="Segoe UI Semibold"/>
               </a:rPr>
-              <a:t>Внешний офис трансфера технологий</a:t>
-            </a:r>
+              <a:t>Внешний </a:t>
+            </a:r>
+            <a:r>
+              <a:rPr sz="3000" b="0" i="0" dirty="0" err="1">
+                <a:solidFill>
+                  <a:srgbClr val="1E2761"/>
+                </a:solidFill>
+                <a:latin typeface="Segoe UI Semibold"/>
+              </a:rPr>
+              <a:t>офис</a:t>
+            </a:r>
+            <a:r>
+              <a:rPr sz="3000" b="0" i="0" dirty="0">
+                <a:solidFill>
+                  <a:srgbClr val="1E2761"/>
+                </a:solidFill>
+                <a:latin typeface="Segoe UI Semibold"/>
+              </a:rPr>
+              <a:t> </a:t>
+            </a:r>
+            <a:r>
+              <a:rPr sz="3000" b="0" i="0" dirty="0" err="1">
+                <a:solidFill>
+                  <a:srgbClr val="1E2761"/>
+                </a:solidFill>
+                <a:latin typeface="Segoe UI Semibold"/>
+              </a:rPr>
+              <a:t>трансфера</a:t>
+            </a:r>
+            <a:r>
+              <a:rPr sz="3000" b="0" i="0" dirty="0">
+                <a:solidFill>
+                  <a:srgbClr val="1E2761"/>
+                </a:solidFill>
+                <a:latin typeface="Segoe UI Semibold"/>
+              </a:rPr>
+              <a:t> </a:t>
+            </a:r>
+            <a:r>
+              <a:rPr sz="3000" b="0" i="0" dirty="0" err="1">
+                <a:solidFill>
+                  <a:srgbClr val="1E2761"/>
+                </a:solidFill>
+                <a:latin typeface="Segoe UI Semibold"/>
+              </a:rPr>
+              <a:t>технологий</a:t>
+            </a:r>
+            <a:endParaRPr sz="3000" b="0" i="0" dirty="0">
+              <a:solidFill>
+                <a:srgbClr val="1E2761"/>
+              </a:solidFill>
+              <a:latin typeface="Segoe UI Semibold"/>
+            </a:endParaRPr>
           </a:p>
         </p:txBody>
       </p:sp>
@@ -17478,7 +17720,7 @@
         <p:spPr>
           <a:xfrm>
             <a:off x="1261872" y="3602736"/>
-            <a:ext cx="2429255" cy="365760"/>
+            <a:ext cx="2429255" cy="256160"/>
           </a:xfrm>
           <a:prstGeom prst="rect">
             <a:avLst/>
@@ -17500,22 +17742,13 @@
               </a:spcAft>
             </a:pPr>
             <a:r>
-              <a:rPr sz="1550" b="0" i="0" dirty="0" err="1">
-                <a:solidFill>
-                  <a:srgbClr val="1B2140"/>
-                </a:solidFill>
-                <a:latin typeface="Segoe UI"/>
-              </a:rPr>
-              <a:t>Загрузка</a:t>
-            </a:r>
-            <a:r>
               <a:rPr sz="1550" b="0" i="0" dirty="0">
                 <a:solidFill>
                   <a:srgbClr val="1B2140"/>
                 </a:solidFill>
                 <a:latin typeface="Segoe UI"/>
               </a:rPr>
-              <a:t> </a:t>
+              <a:t>Загрузка </a:t>
             </a:r>
             <a:r>
               <a:rPr sz="1550" b="0" i="0" dirty="0" err="1">
@@ -17736,7 +17969,7 @@
         <p:spPr>
           <a:xfrm>
             <a:off x="1261872" y="5047488"/>
-            <a:ext cx="2429255" cy="365760"/>
+            <a:ext cx="2429255" cy="537648"/>
           </a:xfrm>
           <a:prstGeom prst="rect">
             <a:avLst/>
@@ -17758,49 +17991,13 @@
               </a:spcAft>
             </a:pPr>
             <a:r>
-              <a:rPr sz="1550" b="0" i="0" dirty="0" err="1">
-                <a:solidFill>
-                  <a:srgbClr val="1B2140"/>
-                </a:solidFill>
-                <a:latin typeface="Segoe UI"/>
-              </a:rPr>
-              <a:t>Расходов</a:t>
-            </a:r>
-            <a:r>
-              <a:rPr sz="1550" b="0" i="0" dirty="0">
-                <a:solidFill>
-                  <a:srgbClr val="1B2140"/>
-                </a:solidFill>
-                <a:latin typeface="Segoe UI"/>
-              </a:rPr>
-              <a:t> </a:t>
-            </a:r>
-            <a:r>
-              <a:rPr sz="1550" b="0" i="0" dirty="0" err="1">
-                <a:solidFill>
-                  <a:srgbClr val="1B2140"/>
-                </a:solidFill>
-                <a:latin typeface="Segoe UI"/>
-              </a:rPr>
-              <a:t>бюджета</a:t>
-            </a:r>
-            <a:r>
-              <a:rPr sz="1550" b="0" i="0" dirty="0">
-                <a:solidFill>
-                  <a:srgbClr val="1B2140"/>
-                </a:solidFill>
-                <a:latin typeface="Segoe UI"/>
-              </a:rPr>
-              <a:t> </a:t>
-            </a:r>
-            <a:r>
-              <a:rPr sz="1550" b="0" i="0" dirty="0" err="1">
-                <a:solidFill>
-                  <a:srgbClr val="1B2140"/>
-                </a:solidFill>
-                <a:latin typeface="Segoe UI"/>
-              </a:rPr>
-              <a:t>нет</a:t>
+              <a:rPr lang="ru-RU" sz="1550" b="0" i="0" dirty="0">
+                <a:solidFill>
+                  <a:srgbClr val="1B2140"/>
+                </a:solidFill>
+                <a:latin typeface="Segoe UI"/>
+              </a:rPr>
+              <a:t>Рост целевых расходов на науку и промышленность</a:t>
             </a:r>
             <a:endParaRPr sz="1550" b="0" i="0" dirty="0">
               <a:solidFill>
@@ -18385,6 +18582,15 @@
               <a:t>Один</a:t>
             </a:r>
             <a:r>
+              <a:rPr lang="ru-RU" sz="1550" b="0" i="0" dirty="0">
+                <a:solidFill>
+                  <a:srgbClr val="1B2140"/>
+                </a:solidFill>
+                <a:latin typeface="Segoe UI"/>
+              </a:rPr>
+              <a:t> управляющий</a:t>
+            </a:r>
+            <a:r>
               <a:rPr sz="1550" b="0" i="0" dirty="0">
                 <a:solidFill>
                   <a:srgbClr val="1B2140"/>
@@ -18412,40 +18618,13 @@
               <a:t> </a:t>
             </a:r>
             <a:r>
-              <a:rPr sz="1550" b="0" i="0" dirty="0" err="1">
-                <a:solidFill>
-                  <a:srgbClr val="1B2140"/>
-                </a:solidFill>
-                <a:latin typeface="Segoe UI"/>
-              </a:rPr>
-              <a:t>вместо</a:t>
-            </a:r>
-            <a:r>
-              <a:rPr sz="1550" b="0" i="0" dirty="0">
-                <a:solidFill>
-                  <a:srgbClr val="1B2140"/>
-                </a:solidFill>
-                <a:latin typeface="Segoe UI"/>
-              </a:rPr>
-              <a:t> </a:t>
-            </a:r>
-            <a:r>
-              <a:rPr sz="1550" b="0" i="0" dirty="0" err="1">
-                <a:solidFill>
-                  <a:srgbClr val="1B2140"/>
-                </a:solidFill>
-                <a:latin typeface="Segoe UI"/>
-              </a:rPr>
-              <a:t>десяти</a:t>
-            </a:r>
-            <a:r>
               <a:rPr lang="ru-RU" sz="1550" b="0" i="0" dirty="0">
                 <a:solidFill>
                   <a:srgbClr val="1B2140"/>
                 </a:solidFill>
                 <a:latin typeface="Segoe UI"/>
               </a:rPr>
-              <a:t> на все этапы</a:t>
+              <a:t>на весь проект</a:t>
             </a:r>
             <a:endParaRPr sz="1550" b="0" i="0" dirty="0">
               <a:solidFill>
@@ -20153,7 +20332,7 @@
         <p:spPr>
           <a:xfrm>
             <a:off x="7255764" y="2066543"/>
-            <a:ext cx="3927348" cy="777240"/>
+            <a:ext cx="3927348" cy="305212"/>
           </a:xfrm>
           <a:prstGeom prst="rect">
             <a:avLst/>
@@ -20175,13 +20354,67 @@
               </a:spcAft>
             </a:pPr>
             <a:r>
-              <a:rPr sz="1900" b="0" i="0">
+              <a:rPr sz="1900" b="0" i="0" dirty="0">
                 <a:solidFill>
                   <a:srgbClr val="1E2761"/>
                 </a:solidFill>
                 <a:latin typeface="Segoe UI Semibold"/>
               </a:rPr>
-              <a:t>Что просите у бюджета?</a:t>
+              <a:t>Что </a:t>
+            </a:r>
+            <a:r>
+              <a:rPr sz="1900" b="0" i="0" dirty="0" err="1">
+                <a:solidFill>
+                  <a:srgbClr val="1E2761"/>
+                </a:solidFill>
+                <a:latin typeface="Segoe UI Semibold"/>
+              </a:rPr>
+              <a:t>просите</a:t>
+            </a:r>
+            <a:r>
+              <a:rPr sz="1900" b="0" i="0" dirty="0">
+                <a:solidFill>
+                  <a:srgbClr val="1E2761"/>
+                </a:solidFill>
+                <a:latin typeface="Segoe UI Semibold"/>
+              </a:rPr>
+              <a:t> </a:t>
+            </a:r>
+            <a:r>
+              <a:rPr sz="1900" b="0" i="0" dirty="0" err="1">
+                <a:solidFill>
+                  <a:srgbClr val="1E2761"/>
+                </a:solidFill>
+                <a:latin typeface="Segoe UI Semibold"/>
+              </a:rPr>
+              <a:t>у</a:t>
+            </a:r>
+            <a:r>
+              <a:rPr sz="1900" b="0" i="0" dirty="0">
+                <a:solidFill>
+                  <a:srgbClr val="1E2761"/>
+                </a:solidFill>
+                <a:latin typeface="Segoe UI Semibold"/>
+              </a:rPr>
+              <a:t> </a:t>
+            </a:r>
+            <a:r>
+              <a:rPr lang="ru-RU" sz="1900" b="0" i="0" dirty="0">
+                <a:solidFill>
+                  <a:srgbClr val="1E2761"/>
+                </a:solidFill>
+                <a:latin typeface="Segoe UI Semibold"/>
+              </a:rPr>
+              <a:t>региона</a:t>
+            </a:r>
+            <a:r>
+              <a:rPr sz="1900" b="0" i="0" dirty="0">
+                <a:solidFill>
+                  <a:srgbClr val="1E2761"/>
+                </a:solidFill>
+                <a:latin typeface="Segoe UI Semibold"/>
+              </a:rPr>
+              <a:t>?</a:t>
             </a:r>
           </a:p>
         </p:txBody>
@@ -20195,7 +20428,7 @@
         <p:spPr>
           <a:xfrm>
             <a:off x="6652260" y="2918097"/>
-            <a:ext cx="4530852" cy="528286"/>
+            <a:ext cx="4530852" cy="805285"/>
           </a:xfrm>
           <a:prstGeom prst="rect">
             <a:avLst/>
@@ -20286,7 +20519,7 @@
                 </a:solidFill>
                 <a:latin typeface="Segoe UI"/>
               </a:rPr>
-              <a:t>. Бюджетные деньги нам не нужны.</a:t>
+              <a:t>. Бюджетные деньги нам не нужны, они уже выделены для предприятий.</a:t>
             </a:r>
             <a:endParaRPr sz="1500" b="0" i="0" dirty="0">
               <a:solidFill>
@@ -21582,4 +21815,319 @@
   </a:objectDefaults>
   <a:extraClrSchemeLst/>
 </a:theme>
+</file>
+
+<file path=ppt/theme/theme2.xml><?xml version="1.0" encoding="utf-8"?>
+<a:theme xmlns:a="http://schemas.openxmlformats.org/drawingml/2006/main" name="Тема Office">
+  <a:themeElements>
+    <a:clrScheme name="Стандартная">
+      <a:dk1>
+        <a:sysClr val="windowText" lastClr="000000"/>
+      </a:dk1>
+      <a:lt1>
+        <a:sysClr val="window" lastClr="FFFFFF"/>
+      </a:lt1>
+      <a:dk2>
+        <a:srgbClr val="0E2841"/>
+      </a:dk2>
+      <a:lt2>
+        <a:srgbClr val="E8E8E8"/>
+      </a:lt2>
+      <a:accent1>
+        <a:srgbClr val="156082"/>
+      </a:accent1>
+      <a:accent2>
+        <a:srgbClr val="E97132"/>
+      </a:accent2>
+      <a:accent3>
+        <a:srgbClr val="196B24"/>
+      </a:accent3>
+      <a:accent4>
+        <a:srgbClr val="0F9ED5"/>
+      </a:accent4>
+      <a:accent5>
+        <a:srgbClr val="A02B93"/>
+      </a:accent5>
+      <a:accent6>
+        <a:srgbClr val="4EA72E"/>
+      </a:accent6>
+      <a:hlink>
+        <a:srgbClr val="467886"/>
+      </a:hlink>
+      <a:folHlink>
+        <a:srgbClr val="96607D"/>
+      </a:folHlink>
+    </a:clrScheme>
+    <a:fontScheme name="Стандартная">
+      <a:majorFont>
+        <a:latin typeface="Aptos Display" panose="02110004020202020204"/>
+        <a:ea typeface=""/>
+        <a:cs typeface=""/>
+        <a:font script="Jpan" typeface="游ゴシック Light"/>
+        <a:font script="Hang" typeface="맑은 고딕"/>
+        <a:font script="Hans" typeface="等线 Light"/>
+        <a:font script="Hant" typeface="新細明體"/>
+        <a:font script="Arab" typeface="Times New Roman"/>
+        <a:font script="Hebr" typeface="Times New Roman"/>
+        <a:font script="Thai" typeface="Angsana New"/>
+        <a:font script="Ethi" typeface="Nyala"/>
+        <a:font script="Beng" typeface="Vrinda"/>
+        <a:font script="Gujr" typeface="Shruti"/>
+        <a:font script="Khmr" typeface="MoolBoran"/>
+        <a:font script="Knda" typeface="Tunga"/>
+        <a:font script="Guru" typeface="Raavi"/>
+        <a:font script="Cans" typeface="Euphemia"/>
+        <a:font script="Cher" typeface="Plantagenet Cherokee"/>
+        <a:font script="Yiii" typeface="Microsoft Yi Baiti"/>
+        <a:font script="Tibt" typeface="Microsoft Himalaya"/>
+        <a:font script="Thaa" typeface="MV Boli"/>
+        <a:font script="Deva" typeface="Mangal"/>
+        <a:font script="Telu" typeface="Gautami"/>
+        <a:font script="Taml" typeface="Latha"/>
+        <a:font script="Syrc" typeface="Estrangelo Edessa"/>
+        <a:font script="Orya" typeface="Kalinga"/>
+        <a:font script="Mlym" typeface="Kartika"/>
+        <a:font script="Laoo" typeface="DokChampa"/>
+        <a:font script="Sinh" typeface="Iskoola Pota"/>
+        <a:font script="Mong" typeface="Mongolian Baiti"/>
+        <a:font script="Viet" typeface="Times New Roman"/>
+        <a:font script="Uigh" typeface="Microsoft Uighur"/>
+        <a:font script="Geor" typeface="Sylfaen"/>
+        <a:font script="Armn" typeface="Arial"/>
+        <a:font script="Bugi" typeface="Leelawadee UI"/>
+        <a:font script="Bopo" typeface="Microsoft JhengHei"/>
+        <a:font script="Java" typeface="Javanese Text"/>
+        <a:font script="Lisu" typeface="Segoe UI"/>
+        <a:font script="Mymr" typeface="Myanmar Text"/>
+        <a:font script="Nkoo" typeface="Ebrima"/>
+        <a:font script="Olck" typeface="Nirmala UI"/>
+        <a:font script="Osma" typeface="Ebrima"/>
+        <a:font script="Phag" typeface="Phagspa"/>
+        <a:font script="Syrn" typeface="Estrangelo Edessa"/>
+        <a:font script="Syrj" typeface="Estrangelo Edessa"/>
+        <a:font script="Syre" typeface="Estrangelo Edessa"/>
+        <a:font script="Sora" typeface="Nirmala UI"/>
+        <a:font script="Tale" typeface="Microsoft Tai Le"/>
+        <a:font script="Talu" typeface="Microsoft New Tai Lue"/>
+        <a:font script="Tfng" typeface="Ebrima"/>
+      </a:majorFont>
+      <a:minorFont>
+        <a:latin typeface="Aptos" panose="02110004020202020204"/>
+        <a:ea typeface=""/>
+        <a:cs typeface=""/>
+        <a:font script="Jpan" typeface="游ゴシック"/>
+        <a:font script="Hang" typeface="맑은 고딕"/>
+        <a:font script="Hans" typeface="等线"/>
+        <a:font script="Hant" typeface="新細明體"/>
+        <a:font script="Arab" typeface="Arial"/>
+        <a:font script="Hebr" typeface="Arial"/>
+        <a:font script="Thai" typeface="Cordia New"/>
+        <a:font script="Ethi" typeface="Nyala"/>
+        <a:font script="Beng" typeface="Vrinda"/>
+        <a:font script="Gujr" typeface="Shruti"/>
+        <a:font script="Khmr" typeface="DaunPenh"/>
+        <a:font script="Knda" typeface="Tunga"/>
+        <a:font script="Guru" typeface="Raavi"/>
+        <a:font script="Cans" typeface="Euphemia"/>
+        <a:font script="Cher" typeface="Plantagenet Cherokee"/>
+        <a:font script="Yiii" typeface="Microsoft Yi Baiti"/>
+        <a:font script="Tibt" typeface="Microsoft Himalaya"/>
+        <a:font script="Thaa" typeface="MV Boli"/>
+        <a:font script="Deva" typeface="Mangal"/>
+        <a:font script="Telu" typeface="Gautami"/>
+        <a:font script="Taml" typeface="Latha"/>
+        <a:font script="Syrc" typeface="Estrangelo Edessa"/>
+        <a:font script="Orya" typeface="Kalinga"/>
+        <a:font script="Mlym" typeface="Kartika"/>
+        <a:font script="Laoo" typeface="DokChampa"/>
+        <a:font script="Sinh" typeface="Iskoola Pota"/>
+        <a:font script="Mong" typeface="Mongolian Baiti"/>
+        <a:font script="Viet" typeface="Arial"/>
+        <a:font script="Uigh" typeface="Microsoft Uighur"/>
+        <a:font script="Geor" typeface="Sylfaen"/>
+        <a:font script="Armn" typeface="Arial"/>
+        <a:font script="Bugi" typeface="Leelawadee UI"/>
+        <a:font script="Bopo" typeface="Microsoft JhengHei"/>
+        <a:font script="Java" typeface="Javanese Text"/>
+        <a:font script="Lisu" typeface="Segoe UI"/>
+        <a:font script="Mymr" typeface="Myanmar Text"/>
+        <a:font script="Nkoo" typeface="Ebrima"/>
+        <a:font script="Olck" typeface="Nirmala UI"/>
+        <a:font script="Osma" typeface="Ebrima"/>
+        <a:font script="Phag" typeface="Phagspa"/>
+        <a:font script="Syrn" typeface="Estrangelo Edessa"/>
+        <a:font script="Syrj" typeface="Estrangelo Edessa"/>
+        <a:font script="Syre" typeface="Estrangelo Edessa"/>
+        <a:font script="Sora" typeface="Nirmala UI"/>
+        <a:font script="Tale" typeface="Microsoft Tai Le"/>
+        <a:font script="Talu" typeface="Microsoft New Tai Lue"/>
+        <a:font script="Tfng" typeface="Ebrima"/>
+      </a:minorFont>
+    </a:fontScheme>
+    <a:fmtScheme name="Стандартная">
+      <a:fillStyleLst>
+        <a:solidFill>
+          <a:schemeClr val="phClr"/>
+        </a:solidFill>
+        <a:gradFill rotWithShape="1">
+          <a:gsLst>
+            <a:gs pos="0">
+              <a:schemeClr val="phClr">
+                <a:lumMod val="110000"/>
+                <a:satMod val="105000"/>
+                <a:tint val="67000"/>
+              </a:schemeClr>
+            </a:gs>
+            <a:gs pos="50000">
+              <a:schemeClr val="phClr">
+                <a:lumMod val="105000"/>
+                <a:satMod val="103000"/>
+                <a:tint val="73000"/>
+              </a:schemeClr>
+            </a:gs>
+            <a:gs pos="100000">
+              <a:schemeClr val="phClr">
+                <a:lumMod val="105000"/>
+                <a:satMod val="109000"/>
+                <a:tint val="81000"/>
+              </a:schemeClr>
+            </a:gs>
+          </a:gsLst>
+          <a:lin ang="5400000" scaled="0"/>
+        </a:gradFill>
+        <a:gradFill rotWithShape="1">
+          <a:gsLst>
+            <a:gs pos="0">
+              <a:schemeClr val="phClr">
+                <a:satMod val="103000"/>
+                <a:lumMod val="102000"/>
+                <a:tint val="94000"/>
+              </a:schemeClr>
+            </a:gs>
+            <a:gs pos="50000">
+              <a:schemeClr val="phClr">
+                <a:satMod val="110000"/>
+                <a:lumMod val="100000"/>
+                <a:shade val="100000"/>
+              </a:schemeClr>
+            </a:gs>
+            <a:gs pos="100000">
+              <a:schemeClr val="phClr">
+                <a:lumMod val="99000"/>
+                <a:satMod val="120000"/>
+                <a:shade val="78000"/>
+              </a:schemeClr>
+            </a:gs>
+          </a:gsLst>
+          <a:lin ang="5400000" scaled="0"/>
+        </a:gradFill>
+      </a:fillStyleLst>
+      <a:lnStyleLst>
+        <a:ln w="12700" cap="flat" cmpd="sng" algn="ctr">
+          <a:solidFill>
+            <a:schemeClr val="phClr"/>
+          </a:solidFill>
+          <a:prstDash val="solid"/>
+          <a:miter lim="800000"/>
+        </a:ln>
+        <a:ln w="19050" cap="flat" cmpd="sng" algn="ctr">
+          <a:solidFill>
+            <a:schemeClr val="phClr"/>
+          </a:solidFill>
+          <a:prstDash val="solid"/>
+          <a:miter lim="800000"/>
+        </a:ln>
+        <a:ln w="25400" cap="flat" cmpd="sng" algn="ctr">
+          <a:solidFill>
+            <a:schemeClr val="phClr"/>
+          </a:solidFill>
+          <a:prstDash val="solid"/>
+          <a:miter lim="800000"/>
+        </a:ln>
+      </a:lnStyleLst>
+      <a:effectStyleLst>
+        <a:effectStyle>
+          <a:effectLst/>
+        </a:effectStyle>
+        <a:effectStyle>
+          <a:effectLst/>
+        </a:effectStyle>
+        <a:effectStyle>
+          <a:effectLst>
+            <a:outerShdw blurRad="57150" dist="19050" dir="5400000" algn="ctr" rotWithShape="0">
+              <a:srgbClr val="000000">
+                <a:alpha val="63000"/>
+              </a:srgbClr>
+            </a:outerShdw>
+          </a:effectLst>
+        </a:effectStyle>
+      </a:effectStyleLst>
+      <a:bgFillStyleLst>
+        <a:solidFill>
+          <a:schemeClr val="phClr"/>
+        </a:solidFill>
+        <a:solidFill>
+          <a:schemeClr val="phClr">
+            <a:tint val="95000"/>
+            <a:satMod val="170000"/>
+          </a:schemeClr>
+        </a:solidFill>
+        <a:gradFill rotWithShape="1">
+          <a:gsLst>
+            <a:gs pos="0">
+              <a:schemeClr val="phClr">
+                <a:tint val="93000"/>
+                <a:satMod val="150000"/>
+                <a:shade val="98000"/>
+                <a:lumMod val="102000"/>
+              </a:schemeClr>
+            </a:gs>
+            <a:gs pos="50000">
+              <a:schemeClr val="phClr">
+                <a:tint val="98000"/>
+                <a:satMod val="130000"/>
+                <a:shade val="90000"/>
+                <a:lumMod val="103000"/>
+              </a:schemeClr>
+            </a:gs>
+            <a:gs pos="100000">
+              <a:schemeClr val="phClr">
+                <a:shade val="63000"/>
+                <a:satMod val="120000"/>
+              </a:schemeClr>
+            </a:gs>
+          </a:gsLst>
+          <a:lin ang="5400000" scaled="0"/>
+        </a:gradFill>
+      </a:bgFillStyleLst>
+    </a:fmtScheme>
+  </a:themeElements>
+  <a:objectDefaults>
+    <a:lnDef>
+      <a:spPr/>
+      <a:bodyPr/>
+      <a:lstStyle/>
+      <a:style>
+        <a:lnRef idx="2">
+          <a:schemeClr val="accent1"/>
+        </a:lnRef>
+        <a:fillRef idx="0">
+          <a:schemeClr val="accent1"/>
+        </a:fillRef>
+        <a:effectRef idx="1">
+          <a:schemeClr val="accent1"/>
+        </a:effectRef>
+        <a:fontRef idx="minor">
+          <a:schemeClr val="tx1"/>
+        </a:fontRef>
+      </a:style>
+    </a:lnDef>
+  </a:objectDefaults>
+  <a:extraClrSchemeLst/>
+  <a:extLst>
+    <a:ext uri="{05A4C25C-085E-4340-85A3-A5531E510DB2}">
+      <thm15:themeFamily xmlns:thm15="http://schemas.microsoft.com/office/thememl/2012/main" name="Office Theme" id="{2E142A2C-CD16-42D6-873A-C26D2A0506FA}" vid="{1BDDFF52-6CD6-40A5-AB3C-68EB2F1E4D0A}"/>
+    </a:ext>
+  </a:extLst>
+</a:theme>
 </file>